--- a/納品レポート/PRIMECHANGE戦略レポート/PRIMECHANGE_CS向上戦略提案書.pptx
+++ b/納品レポート/PRIMECHANGE戦略レポート/PRIMECHANGE_CS向上戦略提案書.pptx
@@ -2274,7 +2274,7 @@
                 <a:ea typeface="Arial" pitchFamily="34" charset="-122"/>
                 <a:cs typeface="Arial" pitchFamily="34" charset="-120"/>
               </a:rPr>
-              <a:t>対象：19ホテル | 月間総売上：¥99,847,777 | 口コミ：2108件</a:t>
+              <a:t>対象：19ホテル | 月間総売上：¥99,847,777 | 口コミ：2157件</a:t>
             </a:r>
             <a:endParaRPr lang="en-US" sz="1100" dirty="0"/>
           </a:p>
@@ -17496,7 +17496,7 @@
                 <a:ea typeface="Arial" pitchFamily="34" charset="-122"/>
                 <a:cs typeface="Arial" pitchFamily="34" charset="-120"/>
               </a:rPr>
-              <a:t>コンフォートスイーツ東京ベイ（9.19点, ¥13,228,360）</a:t>
+              <a:t>コンフォートスイーツ東京ベイ（9.18点, ¥13,228,360）</a:t>
             </a:r>
             <a:endParaRPr lang="en-US" sz="800" dirty="0"/>
           </a:p>
@@ -17513,7 +17513,7 @@
                 <a:ea typeface="Arial" pitchFamily="34" charset="-122"/>
                 <a:cs typeface="Arial" pitchFamily="34" charset="-120"/>
               </a:rPr>
-              <a:t>京成リッチモンドホテル東京錦糸町（9点, ¥4,791,800）</a:t>
+              <a:t>京成リッチモンドホテル東京錦糸町（9.03点, ¥4,791,800）</a:t>
             </a:r>
             <a:endParaRPr lang="en-US" sz="800" dirty="0"/>
           </a:p>
@@ -17530,7 +17530,7 @@
                 <a:ea typeface="Arial" pitchFamily="34" charset="-122"/>
                 <a:cs typeface="Arial" pitchFamily="34" charset="-120"/>
               </a:rPr>
-              <a:t>ダイワロイネットホテル東京大崎（8.88点, ¥5,203,037）</a:t>
+              <a:t>ダイワロイネットホテル東京大崎（8.9点, ¥5,203,037）</a:t>
             </a:r>
             <a:endParaRPr lang="en-US" sz="800" dirty="0"/>
           </a:p>
@@ -17564,7 +17564,7 @@
                 <a:ea typeface="Arial" pitchFamily="34" charset="-122"/>
                 <a:cs typeface="Arial" pitchFamily="34" charset="-120"/>
               </a:rPr>
-              <a:t>ハートンホテル東品川（8.62点, ¥11,211,550）</a:t>
+              <a:t>川崎日航ホテル（8.65点, ¥7,168,120）</a:t>
             </a:r>
             <a:endParaRPr lang="en-US" sz="800" dirty="0"/>
           </a:p>
@@ -17581,7 +17581,7 @@
                 <a:ea typeface="Arial" pitchFamily="34" charset="-122"/>
                 <a:cs typeface="Arial" pitchFamily="34" charset="-120"/>
               </a:rPr>
-              <a:t>川崎日航ホテル（8.62点, ¥7,168,120）</a:t>
+              <a:t>ハートンホテル東品川（8.63点, ¥11,211,550）</a:t>
             </a:r>
             <a:endParaRPr lang="en-US" sz="800" dirty="0"/>
           </a:p>
@@ -17598,7 +17598,7 @@
                 <a:ea typeface="Arial" pitchFamily="34" charset="-122"/>
                 <a:cs typeface="Arial" pitchFamily="34" charset="-120"/>
               </a:rPr>
-              <a:t>変なホテル東京羽田（8.25点, ¥5,358,150）</a:t>
+              <a:t>変なホテル東京羽田（8.27点, ¥5,358,150）</a:t>
             </a:r>
             <a:endParaRPr lang="en-US" sz="800" dirty="0"/>
           </a:p>
@@ -17762,7 +17762,7 @@
                 <a:ea typeface="Arial" pitchFamily="34" charset="-122"/>
                 <a:cs typeface="Arial" pitchFamily="34" charset="-120"/>
               </a:rPr>
-              <a:t>第一イン池袋（9.03点, ¥4,310,610）</a:t>
+              <a:t>第一イン池袋（9.06点, ¥4,310,610）</a:t>
             </a:r>
             <a:endParaRPr lang="en-US" sz="800" dirty="0"/>
           </a:p>
@@ -17779,7 +17779,7 @@
                 <a:ea typeface="Arial" pitchFamily="34" charset="-122"/>
                 <a:cs typeface="Arial" pitchFamily="34" charset="-120"/>
               </a:rPr>
-              <a:t>コンフォートホテルERA東京東神田（8.93点, ¥4,047,280）</a:t>
+              <a:t>コンフォートホテルERA東京東神田（8.91点, ¥4,047,280）</a:t>
             </a:r>
             <a:endParaRPr lang="en-US" sz="800" dirty="0"/>
           </a:p>
@@ -17796,7 +17796,7 @@
                 <a:ea typeface="Arial" pitchFamily="34" charset="-122"/>
                 <a:cs typeface="Arial" pitchFamily="34" charset="-120"/>
               </a:rPr>
-              <a:t>ホテルケヤキゲート東京府中（8.81点, ¥4,425,395）</a:t>
+              <a:t>ホテルケヤキゲート東京府中（8.77点, ¥4,425,395）</a:t>
             </a:r>
             <a:endParaRPr lang="en-US" sz="800" dirty="0"/>
           </a:p>
@@ -17813,7 +17813,7 @@
                 <a:ea typeface="Arial" pitchFamily="34" charset="-122"/>
                 <a:cs typeface="Arial" pitchFamily="34" charset="-120"/>
               </a:rPr>
-              <a:t>リッチモンドホテル東京目白（8.65点, ¥3,663,440）</a:t>
+              <a:t>リッチモンドホテル東京目白（8.66点, ¥3,663,440）</a:t>
             </a:r>
             <a:endParaRPr lang="en-US" sz="800" dirty="0"/>
           </a:p>
@@ -17830,7 +17830,7 @@
                 <a:ea typeface="Arial" pitchFamily="34" charset="-122"/>
                 <a:cs typeface="Arial" pitchFamily="34" charset="-120"/>
               </a:rPr>
-              <a:t>コンフォートホテル成田（8.6点, ¥2,655,760）</a:t>
+              <a:t>コンフォートホテル成田（8.59点, ¥2,655,760）</a:t>
             </a:r>
             <a:endParaRPr lang="en-US" sz="800" dirty="0"/>
           </a:p>
@@ -17864,7 +17864,7 @@
                 <a:ea typeface="Arial" pitchFamily="34" charset="-122"/>
                 <a:cs typeface="Arial" pitchFamily="34" charset="-120"/>
               </a:rPr>
-              <a:t>コンフォートイン六本木（8.1点, ¥2,842,630）</a:t>
+              <a:t>コンフォートイン六本木（8.11点, ¥2,842,630）</a:t>
             </a:r>
             <a:endParaRPr lang="en-US" sz="800" dirty="0"/>
           </a:p>
@@ -18028,7 +18028,7 @@
                 <a:ea typeface="Arial" pitchFamily="34" charset="-122"/>
                 <a:cs typeface="Arial" pitchFamily="34" charset="-120"/>
               </a:rPr>
-              <a:t>コンフォートホテル博多（7.87点, ¥5,764,630）</a:t>
+              <a:t>コンフォートホテル博多（7.89点, ¥5,764,630）</a:t>
             </a:r>
             <a:endParaRPr lang="en-US" sz="800" dirty="0"/>
           </a:p>
@@ -18045,7 +18045,7 @@
                 <a:ea typeface="Arial" pitchFamily="34" charset="-122"/>
                 <a:cs typeface="Arial" pitchFamily="34" charset="-120"/>
               </a:rPr>
-              <a:t>アパホテル蒲田駅東（7.44点, ¥4,679,520）</a:t>
+              <a:t>アパホテル蒲田駅東（7.34点, ¥4,679,520）</a:t>
             </a:r>
             <a:endParaRPr lang="en-US" sz="800" dirty="0"/>
           </a:p>
@@ -18062,7 +18062,7 @@
                 <a:ea typeface="Arial" pitchFamily="34" charset="-122"/>
                 <a:cs typeface="Arial" pitchFamily="34" charset="-120"/>
               </a:rPr>
-              <a:t>チサンホテル浜松町（7.02点, ¥5,578,650）</a:t>
+              <a:t>チサンホテル浜松町（7.03点, ¥5,578,650）</a:t>
             </a:r>
             <a:endParaRPr lang="en-US" sz="800" dirty="0"/>
           </a:p>
@@ -18226,7 +18226,7 @@
                 <a:ea typeface="Arial" pitchFamily="34" charset="-122"/>
                 <a:cs typeface="Arial" pitchFamily="34" charset="-120"/>
               </a:rPr>
-              <a:t>コンフォートホテル横浜関内（7.7点, ¥4,051,890）</a:t>
+              <a:t>コンフォートホテル横浜関内（7.65点, ¥4,051,890）</a:t>
             </a:r>
             <a:endParaRPr lang="en-US" sz="800" dirty="0"/>
           </a:p>
@@ -23510,9 +23510,9 @@
                   <a:srgbClr val="333333"/>
                 </a:solidFill>
               </a:rPr>
-              <a:t>  コンフォートスイーツ東京ベイ（9.19点）
-  第一イン池袋（9.03点）
-  京成リッチモンドホテル東京錦糸町（9点）
+              <a:t>  コンフォートスイーツ東京ベイ（9.18点）
+  第一イン池袋（9.06点）
+  京成リッチモンドホテル東京錦糸町（9.03点）
 </a:t>
             </a:r>
             <a:pPr indent="0" marL="0">
@@ -23536,9 +23536,9 @@
                   <a:srgbClr val="333333"/>
                 </a:solidFill>
               </a:rPr>
-              <a:t>  アパホテル蒲田駅東（7.44点）
+              <a:t>  アパホテル蒲田駅東（7.34点）
+  チサンホテル浜松町（7.03点）
   コートホテル新横浜（7.03点）
-  チサンホテル浜松町（7.02点）
 </a:t>
             </a:r>
             <a:pPr indent="0" marL="0">

--- a/納品レポート/PRIMECHANGE戦略レポート/PRIMECHANGE_CS向上戦略提案書.pptx
+++ b/納品レポート/PRIMECHANGE戦略レポート/PRIMECHANGE_CS向上戦略提案書.pptx
@@ -2274,7 +2274,7 @@
                 <a:ea typeface="Arial" pitchFamily="34" charset="-122"/>
                 <a:cs typeface="Arial" pitchFamily="34" charset="-120"/>
               </a:rPr>
-              <a:t>対象：19ホテル | 月間総売上：¥99,847,777 | 口コミ：2157件</a:t>
+              <a:t>対象：19ホテル | 月間総売上：¥99,847,777 | 口コミ：2194件</a:t>
             </a:r>
             <a:endParaRPr lang="en-US" sz="1100" dirty="0"/>
           </a:p>
@@ -15175,7 +15175,7 @@
                 <a:ea typeface="Arial" pitchFamily="34" charset="-122"/>
                 <a:cs typeface="Arial" pitchFamily="34" charset="-120"/>
               </a:rPr>
-              <a:t>4.7%</a:t>
+              <a:t>4.6%</a:t>
             </a:r>
             <a:endParaRPr lang="en-US" sz="2800" dirty="0"/>
           </a:p>
@@ -17496,7 +17496,7 @@
                 <a:ea typeface="Arial" pitchFamily="34" charset="-122"/>
                 <a:cs typeface="Arial" pitchFamily="34" charset="-120"/>
               </a:rPr>
-              <a:t>コンフォートスイーツ東京ベイ（9.18点, ¥13,228,360）</a:t>
+              <a:t>コンフォートスイーツ東京ベイ（9.17点, ¥13,228,360）</a:t>
             </a:r>
             <a:endParaRPr lang="en-US" sz="800" dirty="0"/>
           </a:p>
@@ -17530,7 +17530,7 @@
                 <a:ea typeface="Arial" pitchFamily="34" charset="-122"/>
                 <a:cs typeface="Arial" pitchFamily="34" charset="-120"/>
               </a:rPr>
-              <a:t>ダイワロイネットホテル東京大崎（8.9点, ¥5,203,037）</a:t>
+              <a:t>ダイワロイネットホテル東京大崎（8.91点, ¥5,203,037）</a:t>
             </a:r>
             <a:endParaRPr lang="en-US" sz="800" dirty="0"/>
           </a:p>
@@ -17547,7 +17547,7 @@
                 <a:ea typeface="Arial" pitchFamily="34" charset="-122"/>
                 <a:cs typeface="Arial" pitchFamily="34" charset="-120"/>
               </a:rPr>
-              <a:t>ホテルコメント横浜関内（8.81点, ¥4,463,320）</a:t>
+              <a:t>ホテルコメント横浜関内（8.83点, ¥4,463,320）</a:t>
             </a:r>
             <a:endParaRPr lang="en-US" sz="800" dirty="0"/>
           </a:p>
@@ -17564,7 +17564,7 @@
                 <a:ea typeface="Arial" pitchFamily="34" charset="-122"/>
                 <a:cs typeface="Arial" pitchFamily="34" charset="-120"/>
               </a:rPr>
-              <a:t>川崎日航ホテル（8.65点, ¥7,168,120）</a:t>
+              <a:t>川崎日航ホテル（8.67点, ¥7,168,120）</a:t>
             </a:r>
             <a:endParaRPr lang="en-US" sz="800" dirty="0"/>
           </a:p>
@@ -17581,7 +17581,7 @@
                 <a:ea typeface="Arial" pitchFamily="34" charset="-122"/>
                 <a:cs typeface="Arial" pitchFamily="34" charset="-120"/>
               </a:rPr>
-              <a:t>ハートンホテル東品川（8.63点, ¥11,211,550）</a:t>
+              <a:t>ハートンホテル東品川（8.66点, ¥11,211,550）</a:t>
             </a:r>
             <a:endParaRPr lang="en-US" sz="800" dirty="0"/>
           </a:p>
@@ -17762,7 +17762,7 @@
                 <a:ea typeface="Arial" pitchFamily="34" charset="-122"/>
                 <a:cs typeface="Arial" pitchFamily="34" charset="-120"/>
               </a:rPr>
-              <a:t>第一イン池袋（9.06点, ¥4,310,610）</a:t>
+              <a:t>第一イン池袋（9.08点, ¥4,310,610）</a:t>
             </a:r>
             <a:endParaRPr lang="en-US" sz="800" dirty="0"/>
           </a:p>
@@ -17779,7 +17779,7 @@
                 <a:ea typeface="Arial" pitchFamily="34" charset="-122"/>
                 <a:cs typeface="Arial" pitchFamily="34" charset="-120"/>
               </a:rPr>
-              <a:t>コンフォートホテルERA東京東神田（8.91点, ¥4,047,280）</a:t>
+              <a:t>コンフォートホテルERA東京東神田（8.94点, ¥4,047,280）</a:t>
             </a:r>
             <a:endParaRPr lang="en-US" sz="800" dirty="0"/>
           </a:p>
@@ -17830,7 +17830,7 @@
                 <a:ea typeface="Arial" pitchFamily="34" charset="-122"/>
                 <a:cs typeface="Arial" pitchFamily="34" charset="-120"/>
               </a:rPr>
-              <a:t>コンフォートホテル成田（8.59点, ¥2,655,760）</a:t>
+              <a:t>コンフォートホテル成田（8.54点, ¥2,655,760）</a:t>
             </a:r>
             <a:endParaRPr lang="en-US" sz="800" dirty="0"/>
           </a:p>
@@ -17847,7 +17847,7 @@
                 <a:ea typeface="Arial" pitchFamily="34" charset="-122"/>
                 <a:cs typeface="Arial" pitchFamily="34" charset="-120"/>
               </a:rPr>
-              <a:t>アパホテル相模原橋本駅東（8.12点, ¥2,698,420）</a:t>
+              <a:t>コンフォートイン六本木（8.16点, ¥2,842,630）</a:t>
             </a:r>
             <a:endParaRPr lang="en-US" sz="800" dirty="0"/>
           </a:p>
@@ -17864,7 +17864,7 @@
                 <a:ea typeface="Arial" pitchFamily="34" charset="-122"/>
                 <a:cs typeface="Arial" pitchFamily="34" charset="-120"/>
               </a:rPr>
-              <a:t>コンフォートイン六本木（8.11点, ¥2,842,630）</a:t>
+              <a:t>アパホテル相模原橋本駅東（8.12点, ¥2,698,420）</a:t>
             </a:r>
             <a:endParaRPr lang="en-US" sz="800" dirty="0"/>
           </a:p>
@@ -18028,7 +18028,7 @@
                 <a:ea typeface="Arial" pitchFamily="34" charset="-122"/>
                 <a:cs typeface="Arial" pitchFamily="34" charset="-120"/>
               </a:rPr>
-              <a:t>コンフォートホテル博多（7.89点, ¥5,764,630）</a:t>
+              <a:t>コンフォートホテル博多（7.86点, ¥5,764,630）</a:t>
             </a:r>
             <a:endParaRPr lang="en-US" sz="800" dirty="0"/>
           </a:p>
@@ -18045,7 +18045,7 @@
                 <a:ea typeface="Arial" pitchFamily="34" charset="-122"/>
                 <a:cs typeface="Arial" pitchFamily="34" charset="-120"/>
               </a:rPr>
-              <a:t>アパホテル蒲田駅東（7.34点, ¥4,679,520）</a:t>
+              <a:t>アパホテル蒲田駅東（7.35点, ¥4,679,520）</a:t>
             </a:r>
             <a:endParaRPr lang="en-US" sz="800" dirty="0"/>
           </a:p>
@@ -18062,7 +18062,7 @@
                 <a:ea typeface="Arial" pitchFamily="34" charset="-122"/>
                 <a:cs typeface="Arial" pitchFamily="34" charset="-120"/>
               </a:rPr>
-              <a:t>チサンホテル浜松町（7.03点, ¥5,578,650）</a:t>
+              <a:t>チサンホテル浜松町（7.07点, ¥5,578,650）</a:t>
             </a:r>
             <a:endParaRPr lang="en-US" sz="800" dirty="0"/>
           </a:p>
@@ -18226,7 +18226,7 @@
                 <a:ea typeface="Arial" pitchFamily="34" charset="-122"/>
                 <a:cs typeface="Arial" pitchFamily="34" charset="-120"/>
               </a:rPr>
-              <a:t>コンフォートホテル横浜関内（7.65点, ¥4,051,890）</a:t>
+              <a:t>コンフォートホテル横浜関内（7.57点, ¥4,051,890）</a:t>
             </a:r>
             <a:endParaRPr lang="en-US" sz="800" dirty="0"/>
           </a:p>
@@ -23510,8 +23510,8 @@
                   <a:srgbClr val="333333"/>
                 </a:solidFill>
               </a:rPr>
-              <a:t>  コンフォートスイーツ東京ベイ（9.18点）
-  第一イン池袋（9.06点）
+              <a:t>  コンフォートスイーツ東京ベイ（9.17点）
+  第一イン池袋（9.08点）
   京成リッチモンドホテル東京錦糸町（9.03点）
 </a:t>
             </a:r>
@@ -23536,8 +23536,8 @@
                   <a:srgbClr val="333333"/>
                 </a:solidFill>
               </a:rPr>
-              <a:t>  アパホテル蒲田駅東（7.34点）
-  チサンホテル浜松町（7.03点）
+              <a:t>  アパホテル蒲田駅東（7.35点）
+  チサンホテル浜松町（7.07点）
   コートホテル新横浜（7.03点）
 </a:t>
             </a:r>

--- a/納品レポート/PRIMECHANGE戦略レポート/PRIMECHANGE_CS向上戦略提案書.pptx
+++ b/納品レポート/PRIMECHANGE戦略レポート/PRIMECHANGE_CS向上戦略提案書.pptx
@@ -2274,7 +2274,7 @@
                 <a:ea typeface="Arial" pitchFamily="34" charset="-122"/>
                 <a:cs typeface="Arial" pitchFamily="34" charset="-120"/>
               </a:rPr>
-              <a:t>対象：19ホテル | 月間総売上：¥99,847,777 | 口コミ：2194件</a:t>
+              <a:t>対象：19ホテル | 月間総売上：¥99,847,777 | 口コミ：2221件</a:t>
             </a:r>
             <a:endParaRPr lang="en-US" sz="1100" dirty="0"/>
           </a:p>
@@ -14925,7 +14925,7 @@
                 <a:ea typeface="Arial" pitchFamily="34" charset="-122"/>
                 <a:cs typeface="Arial" pitchFamily="34" charset="-120"/>
               </a:rPr>
-              <a:t>8.38</a:t>
+              <a:t>8.39</a:t>
             </a:r>
             <a:endParaRPr lang="en-US" sz="2800" dirty="0"/>
           </a:p>
@@ -15175,7 +15175,7 @@
                 <a:ea typeface="Arial" pitchFamily="34" charset="-122"/>
                 <a:cs typeface="Arial" pitchFamily="34" charset="-120"/>
               </a:rPr>
-              <a:t>4.6%</a:t>
+              <a:t>4.5%</a:t>
             </a:r>
             <a:endParaRPr lang="en-US" sz="2800" dirty="0"/>
           </a:p>
@@ -16916,7 +16916,7 @@
                   <a:srgbClr val="333333"/>
                 </a:solidFill>
               </a:rPr>
-              <a:t>8.38点</a:t>
+              <a:t>8.39点</a:t>
             </a:r>
             <a:pPr indent="0" marL="0">
               <a:buNone/>
@@ -17547,7 +17547,7 @@
                 <a:ea typeface="Arial" pitchFamily="34" charset="-122"/>
                 <a:cs typeface="Arial" pitchFamily="34" charset="-120"/>
               </a:rPr>
-              <a:t>ホテルコメント横浜関内（8.83点, ¥4,463,320）</a:t>
+              <a:t>ホテルコメント横浜関内（8.86点, ¥4,463,320）</a:t>
             </a:r>
             <a:endParaRPr lang="en-US" sz="800" dirty="0"/>
           </a:p>
@@ -17564,7 +17564,7 @@
                 <a:ea typeface="Arial" pitchFamily="34" charset="-122"/>
                 <a:cs typeface="Arial" pitchFamily="34" charset="-120"/>
               </a:rPr>
-              <a:t>川崎日航ホテル（8.67点, ¥7,168,120）</a:t>
+              <a:t>ハートンホテル東品川（8.68点, ¥11,211,550）</a:t>
             </a:r>
             <a:endParaRPr lang="en-US" sz="800" dirty="0"/>
           </a:p>
@@ -17581,7 +17581,7 @@
                 <a:ea typeface="Arial" pitchFamily="34" charset="-122"/>
                 <a:cs typeface="Arial" pitchFamily="34" charset="-120"/>
               </a:rPr>
-              <a:t>ハートンホテル東品川（8.66点, ¥11,211,550）</a:t>
+              <a:t>川崎日航ホテル（8.67点, ¥7,168,120）</a:t>
             </a:r>
             <a:endParaRPr lang="en-US" sz="800" dirty="0"/>
           </a:p>
@@ -17598,7 +17598,7 @@
                 <a:ea typeface="Arial" pitchFamily="34" charset="-122"/>
                 <a:cs typeface="Arial" pitchFamily="34" charset="-120"/>
               </a:rPr>
-              <a:t>変なホテル東京羽田（8.27点, ¥5,358,150）</a:t>
+              <a:t>変なホテル東京羽田（8.28点, ¥5,358,150）</a:t>
             </a:r>
             <a:endParaRPr lang="en-US" sz="800" dirty="0"/>
           </a:p>
@@ -17762,7 +17762,7 @@
                 <a:ea typeface="Arial" pitchFamily="34" charset="-122"/>
                 <a:cs typeface="Arial" pitchFamily="34" charset="-120"/>
               </a:rPr>
-              <a:t>第一イン池袋（9.08点, ¥4,310,610）</a:t>
+              <a:t>第一イン池袋（9.06点, ¥4,310,610）</a:t>
             </a:r>
             <a:endParaRPr lang="en-US" sz="800" dirty="0"/>
           </a:p>
@@ -17779,7 +17779,7 @@
                 <a:ea typeface="Arial" pitchFamily="34" charset="-122"/>
                 <a:cs typeface="Arial" pitchFamily="34" charset="-120"/>
               </a:rPr>
-              <a:t>コンフォートホテルERA東京東神田（8.94点, ¥4,047,280）</a:t>
+              <a:t>コンフォートホテルERA東京東神田（8.96点, ¥4,047,280）</a:t>
             </a:r>
             <a:endParaRPr lang="en-US" sz="800" dirty="0"/>
           </a:p>
@@ -17796,7 +17796,7 @@
                 <a:ea typeface="Arial" pitchFamily="34" charset="-122"/>
                 <a:cs typeface="Arial" pitchFamily="34" charset="-120"/>
               </a:rPr>
-              <a:t>ホテルケヤキゲート東京府中（8.77点, ¥4,425,395）</a:t>
+              <a:t>ホテルケヤキゲート東京府中（8.79点, ¥4,425,395）</a:t>
             </a:r>
             <a:endParaRPr lang="en-US" sz="800" dirty="0"/>
           </a:p>
@@ -17830,7 +17830,7 @@
                 <a:ea typeface="Arial" pitchFamily="34" charset="-122"/>
                 <a:cs typeface="Arial" pitchFamily="34" charset="-120"/>
               </a:rPr>
-              <a:t>コンフォートホテル成田（8.54点, ¥2,655,760）</a:t>
+              <a:t>コンフォートホテル成田（8.53点, ¥2,655,760）</a:t>
             </a:r>
             <a:endParaRPr lang="en-US" sz="800" dirty="0"/>
           </a:p>
@@ -18028,7 +18028,7 @@
                 <a:ea typeface="Arial" pitchFamily="34" charset="-122"/>
                 <a:cs typeface="Arial" pitchFamily="34" charset="-120"/>
               </a:rPr>
-              <a:t>コンフォートホテル博多（7.86点, ¥5,764,630）</a:t>
+              <a:t>コンフォートホテル博多（7.8点, ¥5,764,630）</a:t>
             </a:r>
             <a:endParaRPr lang="en-US" sz="800" dirty="0"/>
           </a:p>
@@ -18045,7 +18045,7 @@
                 <a:ea typeface="Arial" pitchFamily="34" charset="-122"/>
                 <a:cs typeface="Arial" pitchFamily="34" charset="-120"/>
               </a:rPr>
-              <a:t>アパホテル蒲田駅東（7.35点, ¥4,679,520）</a:t>
+              <a:t>アパホテル蒲田駅東（7.39点, ¥4,679,520）</a:t>
             </a:r>
             <a:endParaRPr lang="en-US" sz="800" dirty="0"/>
           </a:p>
@@ -18226,7 +18226,7 @@
                 <a:ea typeface="Arial" pitchFamily="34" charset="-122"/>
                 <a:cs typeface="Arial" pitchFamily="34" charset="-120"/>
               </a:rPr>
-              <a:t>コンフォートホテル横浜関内（7.57点, ¥4,051,890）</a:t>
+              <a:t>コンフォートホテル横浜関内（7.53点, ¥4,051,890）</a:t>
             </a:r>
             <a:endParaRPr lang="en-US" sz="800" dirty="0"/>
           </a:p>
@@ -23511,7 +23511,7 @@
                 </a:solidFill>
               </a:rPr>
               <a:t>  コンフォートスイーツ東京ベイ（9.17点）
-  第一イン池袋（9.08点）
+  第一イン池袋（9.06点）
   京成リッチモンドホテル東京錦糸町（9.03点）
 </a:t>
             </a:r>
@@ -23536,7 +23536,7 @@
                   <a:srgbClr val="333333"/>
                 </a:solidFill>
               </a:rPr>
-              <a:t>  アパホテル蒲田駅東（7.35点）
+              <a:t>  アパホテル蒲田駅東（7.39点）
   チサンホテル浜松町（7.07点）
   コートホテル新横浜（7.03点）
 </a:t>

--- a/納品レポート/PRIMECHANGE戦略レポート/PRIMECHANGE_CS向上戦略提案書.pptx
+++ b/納品レポート/PRIMECHANGE戦略レポート/PRIMECHANGE_CS向上戦略提案書.pptx
@@ -2274,7 +2274,7 @@
                 <a:ea typeface="Arial" pitchFamily="34" charset="-122"/>
                 <a:cs typeface="Arial" pitchFamily="34" charset="-120"/>
               </a:rPr>
-              <a:t>対象：19ホテル | 月間総売上：¥99,847,777 | 口コミ：2221件</a:t>
+              <a:t>対象：19ホテル | 月間総売上：¥99,847,777 | 口コミ：2260件</a:t>
             </a:r>
             <a:endParaRPr lang="en-US" sz="1100" dirty="0"/>
           </a:p>
@@ -17496,7 +17496,7 @@
                 <a:ea typeface="Arial" pitchFamily="34" charset="-122"/>
                 <a:cs typeface="Arial" pitchFamily="34" charset="-120"/>
               </a:rPr>
-              <a:t>コンフォートスイーツ東京ベイ（9.17点, ¥13,228,360）</a:t>
+              <a:t>コンフォートスイーツ東京ベイ（9.21点, ¥13,228,360）</a:t>
             </a:r>
             <a:endParaRPr lang="en-US" sz="800" dirty="0"/>
           </a:p>
@@ -17513,7 +17513,7 @@
                 <a:ea typeface="Arial" pitchFamily="34" charset="-122"/>
                 <a:cs typeface="Arial" pitchFamily="34" charset="-120"/>
               </a:rPr>
-              <a:t>京成リッチモンドホテル東京錦糸町（9.03点, ¥4,791,800）</a:t>
+              <a:t>京成リッチモンドホテル東京錦糸町（9.05点, ¥4,791,800）</a:t>
             </a:r>
             <a:endParaRPr lang="en-US" sz="800" dirty="0"/>
           </a:p>
@@ -17530,7 +17530,7 @@
                 <a:ea typeface="Arial" pitchFamily="34" charset="-122"/>
                 <a:cs typeface="Arial" pitchFamily="34" charset="-120"/>
               </a:rPr>
-              <a:t>ダイワロイネットホテル東京大崎（8.91点, ¥5,203,037）</a:t>
+              <a:t>ダイワロイネットホテル東京大崎（8.87点, ¥5,203,037）</a:t>
             </a:r>
             <a:endParaRPr lang="en-US" sz="800" dirty="0"/>
           </a:p>
@@ -17547,7 +17547,7 @@
                 <a:ea typeface="Arial" pitchFamily="34" charset="-122"/>
                 <a:cs typeface="Arial" pitchFamily="34" charset="-120"/>
               </a:rPr>
-              <a:t>ホテルコメント横浜関内（8.86点, ¥4,463,320）</a:t>
+              <a:t>ホテルコメント横浜関内（8.87点, ¥4,463,320）</a:t>
             </a:r>
             <a:endParaRPr lang="en-US" sz="800" dirty="0"/>
           </a:p>
@@ -17564,7 +17564,7 @@
                 <a:ea typeface="Arial" pitchFamily="34" charset="-122"/>
                 <a:cs typeface="Arial" pitchFamily="34" charset="-120"/>
               </a:rPr>
-              <a:t>ハートンホテル東品川（8.68点, ¥11,211,550）</a:t>
+              <a:t>川崎日航ホテル（8.73点, ¥7,168,120）</a:t>
             </a:r>
             <a:endParaRPr lang="en-US" sz="800" dirty="0"/>
           </a:p>
@@ -17581,7 +17581,7 @@
                 <a:ea typeface="Arial" pitchFamily="34" charset="-122"/>
                 <a:cs typeface="Arial" pitchFamily="34" charset="-120"/>
               </a:rPr>
-              <a:t>川崎日航ホテル（8.67点, ¥7,168,120）</a:t>
+              <a:t>ハートンホテル東品川（8.65点, ¥11,211,550）</a:t>
             </a:r>
             <a:endParaRPr lang="en-US" sz="800" dirty="0"/>
           </a:p>
@@ -17598,7 +17598,7 @@
                 <a:ea typeface="Arial" pitchFamily="34" charset="-122"/>
                 <a:cs typeface="Arial" pitchFamily="34" charset="-120"/>
               </a:rPr>
-              <a:t>変なホテル東京羽田（8.28点, ¥5,358,150）</a:t>
+              <a:t>変なホテル東京羽田（8.27点, ¥5,358,150）</a:t>
             </a:r>
             <a:endParaRPr lang="en-US" sz="800" dirty="0"/>
           </a:p>
@@ -17762,7 +17762,7 @@
                 <a:ea typeface="Arial" pitchFamily="34" charset="-122"/>
                 <a:cs typeface="Arial" pitchFamily="34" charset="-120"/>
               </a:rPr>
-              <a:t>第一イン池袋（9.06点, ¥4,310,610）</a:t>
+              <a:t>第一イン池袋（9.08点, ¥4,310,610）</a:t>
             </a:r>
             <a:endParaRPr lang="en-US" sz="800" dirty="0"/>
           </a:p>
@@ -17779,7 +17779,7 @@
                 <a:ea typeface="Arial" pitchFamily="34" charset="-122"/>
                 <a:cs typeface="Arial" pitchFamily="34" charset="-120"/>
               </a:rPr>
-              <a:t>コンフォートホテルERA東京東神田（8.96点, ¥4,047,280）</a:t>
+              <a:t>コンフォートホテルERA東京東神田（8.94点, ¥4,047,280）</a:t>
             </a:r>
             <a:endParaRPr lang="en-US" sz="800" dirty="0"/>
           </a:p>
@@ -17796,7 +17796,7 @@
                 <a:ea typeface="Arial" pitchFamily="34" charset="-122"/>
                 <a:cs typeface="Arial" pitchFamily="34" charset="-120"/>
               </a:rPr>
-              <a:t>ホテルケヤキゲート東京府中（8.79点, ¥4,425,395）</a:t>
+              <a:t>ホテルケヤキゲート東京府中（8.78点, ¥4,425,395）</a:t>
             </a:r>
             <a:endParaRPr lang="en-US" sz="800" dirty="0"/>
           </a:p>
@@ -17813,7 +17813,7 @@
                 <a:ea typeface="Arial" pitchFamily="34" charset="-122"/>
                 <a:cs typeface="Arial" pitchFamily="34" charset="-120"/>
               </a:rPr>
-              <a:t>リッチモンドホテル東京目白（8.66点, ¥3,663,440）</a:t>
+              <a:t>リッチモンドホテル東京目白（8.69点, ¥3,663,440）</a:t>
             </a:r>
             <a:endParaRPr lang="en-US" sz="800" dirty="0"/>
           </a:p>
@@ -17830,7 +17830,7 @@
                 <a:ea typeface="Arial" pitchFamily="34" charset="-122"/>
                 <a:cs typeface="Arial" pitchFamily="34" charset="-120"/>
               </a:rPr>
-              <a:t>コンフォートホテル成田（8.53点, ¥2,655,760）</a:t>
+              <a:t>コンフォートホテル成田（8.55点, ¥2,655,760）</a:t>
             </a:r>
             <a:endParaRPr lang="en-US" sz="800" dirty="0"/>
           </a:p>
@@ -17847,7 +17847,7 @@
                 <a:ea typeface="Arial" pitchFamily="34" charset="-122"/>
                 <a:cs typeface="Arial" pitchFamily="34" charset="-120"/>
               </a:rPr>
-              <a:t>コンフォートイン六本木（8.16点, ¥2,842,630）</a:t>
+              <a:t>コンフォートイン六本木（8.15点, ¥2,842,630）</a:t>
             </a:r>
             <a:endParaRPr lang="en-US" sz="800" dirty="0"/>
           </a:p>
@@ -17864,7 +17864,7 @@
                 <a:ea typeface="Arial" pitchFamily="34" charset="-122"/>
                 <a:cs typeface="Arial" pitchFamily="34" charset="-120"/>
               </a:rPr>
-              <a:t>アパホテル相模原橋本駅東（8.12点, ¥2,698,420）</a:t>
+              <a:t>アパホテル相模原橋本駅東（8.1点, ¥2,698,420）</a:t>
             </a:r>
             <a:endParaRPr lang="en-US" sz="800" dirty="0"/>
           </a:p>
@@ -18028,7 +18028,7 @@
                 <a:ea typeface="Arial" pitchFamily="34" charset="-122"/>
                 <a:cs typeface="Arial" pitchFamily="34" charset="-120"/>
               </a:rPr>
-              <a:t>コンフォートホテル博多（7.8点, ¥5,764,630）</a:t>
+              <a:t>コンフォートホテル博多（7.79点, ¥5,764,630）</a:t>
             </a:r>
             <a:endParaRPr lang="en-US" sz="800" dirty="0"/>
           </a:p>
@@ -18045,7 +18045,7 @@
                 <a:ea typeface="Arial" pitchFamily="34" charset="-122"/>
                 <a:cs typeface="Arial" pitchFamily="34" charset="-120"/>
               </a:rPr>
-              <a:t>アパホテル蒲田駅東（7.39点, ¥4,679,520）</a:t>
+              <a:t>アパホテル蒲田駅東（7.45点, ¥4,679,520）</a:t>
             </a:r>
             <a:endParaRPr lang="en-US" sz="800" dirty="0"/>
           </a:p>
@@ -18062,7 +18062,7 @@
                 <a:ea typeface="Arial" pitchFamily="34" charset="-122"/>
                 <a:cs typeface="Arial" pitchFamily="34" charset="-120"/>
               </a:rPr>
-              <a:t>チサンホテル浜松町（7.07点, ¥5,578,650）</a:t>
+              <a:t>チサンホテル浜松町（7.11点, ¥5,578,650）</a:t>
             </a:r>
             <a:endParaRPr lang="en-US" sz="800" dirty="0"/>
           </a:p>
@@ -18226,7 +18226,7 @@
                 <a:ea typeface="Arial" pitchFamily="34" charset="-122"/>
                 <a:cs typeface="Arial" pitchFamily="34" charset="-120"/>
               </a:rPr>
-              <a:t>コンフォートホテル横浜関内（7.53点, ¥4,051,890）</a:t>
+              <a:t>コンフォートホテル横浜関内（7.46点, ¥4,051,890）</a:t>
             </a:r>
             <a:endParaRPr lang="en-US" sz="800" dirty="0"/>
           </a:p>
@@ -23510,9 +23510,9 @@
                   <a:srgbClr val="333333"/>
                 </a:solidFill>
               </a:rPr>
-              <a:t>  コンフォートスイーツ東京ベイ（9.17点）
-  第一イン池袋（9.06点）
-  京成リッチモンドホテル東京錦糸町（9.03点）
+              <a:t>  コンフォートスイーツ東京ベイ（9.21点）
+  第一イン池袋（9.08点）
+  京成リッチモンドホテル東京錦糸町（9.05点）
 </a:t>
             </a:r>
             <a:pPr indent="0" marL="0">
@@ -23536,8 +23536,8 @@
                   <a:srgbClr val="333333"/>
                 </a:solidFill>
               </a:rPr>
-              <a:t>  アパホテル蒲田駅東（7.39点）
-  チサンホテル浜松町（7.07点）
+              <a:t>  アパホテル蒲田駅東（7.45点）
+  チサンホテル浜松町（7.11点）
   コートホテル新横浜（7.03点）
 </a:t>
             </a:r>

--- a/納品レポート/PRIMECHANGE戦略レポート/PRIMECHANGE_CS向上戦略提案書.pptx
+++ b/納品レポート/PRIMECHANGE戦略レポート/PRIMECHANGE_CS向上戦略提案書.pptx
@@ -2274,7 +2274,7 @@
                 <a:ea typeface="Arial" pitchFamily="34" charset="-122"/>
                 <a:cs typeface="Arial" pitchFamily="34" charset="-120"/>
               </a:rPr>
-              <a:t>対象：19ホテル | 月間総売上：¥99,847,777 | 口コミ：2260件</a:t>
+              <a:t>対象：19ホテル | 月間総売上：¥99,847,777 | 口コミ：2323件</a:t>
             </a:r>
             <a:endParaRPr lang="en-US" sz="1100" dirty="0"/>
           </a:p>
@@ -15175,7 +15175,7 @@
                 <a:ea typeface="Arial" pitchFamily="34" charset="-122"/>
                 <a:cs typeface="Arial" pitchFamily="34" charset="-120"/>
               </a:rPr>
-              <a:t>4.5%</a:t>
+              <a:t>4.4%</a:t>
             </a:r>
             <a:endParaRPr lang="en-US" sz="2800" dirty="0"/>
           </a:p>
@@ -17496,7 +17496,7 @@
                 <a:ea typeface="Arial" pitchFamily="34" charset="-122"/>
                 <a:cs typeface="Arial" pitchFamily="34" charset="-120"/>
               </a:rPr>
-              <a:t>コンフォートスイーツ東京ベイ（9.21点, ¥13,228,360）</a:t>
+              <a:t>コンフォートスイーツ東京ベイ（9.24点, ¥13,228,360）</a:t>
             </a:r>
             <a:endParaRPr lang="en-US" sz="800" dirty="0"/>
           </a:p>
@@ -17513,7 +17513,7 @@
                 <a:ea typeface="Arial" pitchFamily="34" charset="-122"/>
                 <a:cs typeface="Arial" pitchFamily="34" charset="-120"/>
               </a:rPr>
-              <a:t>京成リッチモンドホテル東京錦糸町（9.05点, ¥4,791,800）</a:t>
+              <a:t>京成リッチモンドホテル東京錦糸町（9.06点, ¥4,791,800）</a:t>
             </a:r>
             <a:endParaRPr lang="en-US" sz="800" dirty="0"/>
           </a:p>
@@ -17530,7 +17530,7 @@
                 <a:ea typeface="Arial" pitchFamily="34" charset="-122"/>
                 <a:cs typeface="Arial" pitchFamily="34" charset="-120"/>
               </a:rPr>
-              <a:t>ダイワロイネットホテル東京大崎（8.87点, ¥5,203,037）</a:t>
+              <a:t>ホテルコメント横浜関内（8.88点, ¥4,463,320）</a:t>
             </a:r>
             <a:endParaRPr lang="en-US" sz="800" dirty="0"/>
           </a:p>
@@ -17547,7 +17547,7 @@
                 <a:ea typeface="Arial" pitchFamily="34" charset="-122"/>
                 <a:cs typeface="Arial" pitchFamily="34" charset="-120"/>
               </a:rPr>
-              <a:t>ホテルコメント横浜関内（8.87点, ¥4,463,320）</a:t>
+              <a:t>ダイワロイネットホテル東京大崎（8.84点, ¥5,203,037）</a:t>
             </a:r>
             <a:endParaRPr lang="en-US" sz="800" dirty="0"/>
           </a:p>
@@ -17564,7 +17564,7 @@
                 <a:ea typeface="Arial" pitchFamily="34" charset="-122"/>
                 <a:cs typeface="Arial" pitchFamily="34" charset="-120"/>
               </a:rPr>
-              <a:t>川崎日航ホテル（8.73点, ¥7,168,120）</a:t>
+              <a:t>川崎日航ホテル（8.71点, ¥7,168,120）</a:t>
             </a:r>
             <a:endParaRPr lang="en-US" sz="800" dirty="0"/>
           </a:p>
@@ -17581,7 +17581,7 @@
                 <a:ea typeface="Arial" pitchFamily="34" charset="-122"/>
                 <a:cs typeface="Arial" pitchFamily="34" charset="-120"/>
               </a:rPr>
-              <a:t>ハートンホテル東品川（8.65点, ¥11,211,550）</a:t>
+              <a:t>ハートンホテル東品川（8.69点, ¥11,211,550）</a:t>
             </a:r>
             <a:endParaRPr lang="en-US" sz="800" dirty="0"/>
           </a:p>
@@ -17598,7 +17598,7 @@
                 <a:ea typeface="Arial" pitchFamily="34" charset="-122"/>
                 <a:cs typeface="Arial" pitchFamily="34" charset="-120"/>
               </a:rPr>
-              <a:t>変なホテル東京羽田（8.27点, ¥5,358,150）</a:t>
+              <a:t>変なホテル東京羽田（8.29点, ¥5,358,150）</a:t>
             </a:r>
             <a:endParaRPr lang="en-US" sz="800" dirty="0"/>
           </a:p>
@@ -17762,7 +17762,7 @@
                 <a:ea typeface="Arial" pitchFamily="34" charset="-122"/>
                 <a:cs typeface="Arial" pitchFamily="34" charset="-120"/>
               </a:rPr>
-              <a:t>第一イン池袋（9.08点, ¥4,310,610）</a:t>
+              <a:t>第一イン池袋（9.12点, ¥4,310,610）</a:t>
             </a:r>
             <a:endParaRPr lang="en-US" sz="800" dirty="0"/>
           </a:p>
@@ -17779,7 +17779,7 @@
                 <a:ea typeface="Arial" pitchFamily="34" charset="-122"/>
                 <a:cs typeface="Arial" pitchFamily="34" charset="-120"/>
               </a:rPr>
-              <a:t>コンフォートホテルERA東京東神田（8.94点, ¥4,047,280）</a:t>
+              <a:t>コンフォートホテルERA東京東神田（8.95点, ¥4,047,280）</a:t>
             </a:r>
             <a:endParaRPr lang="en-US" sz="800" dirty="0"/>
           </a:p>
@@ -17796,7 +17796,7 @@
                 <a:ea typeface="Arial" pitchFamily="34" charset="-122"/>
                 <a:cs typeface="Arial" pitchFamily="34" charset="-120"/>
               </a:rPr>
-              <a:t>ホテルケヤキゲート東京府中（8.78点, ¥4,425,395）</a:t>
+              <a:t>ホテルケヤキゲート東京府中（8.74点, ¥4,425,395）</a:t>
             </a:r>
             <a:endParaRPr lang="en-US" sz="800" dirty="0"/>
           </a:p>
@@ -17813,7 +17813,7 @@
                 <a:ea typeface="Arial" pitchFamily="34" charset="-122"/>
                 <a:cs typeface="Arial" pitchFamily="34" charset="-120"/>
               </a:rPr>
-              <a:t>リッチモンドホテル東京目白（8.69点, ¥3,663,440）</a:t>
+              <a:t>リッチモンドホテル東京目白（8.68点, ¥3,663,440）</a:t>
             </a:r>
             <a:endParaRPr lang="en-US" sz="800" dirty="0"/>
           </a:p>
@@ -17830,7 +17830,7 @@
                 <a:ea typeface="Arial" pitchFamily="34" charset="-122"/>
                 <a:cs typeface="Arial" pitchFamily="34" charset="-120"/>
               </a:rPr>
-              <a:t>コンフォートホテル成田（8.55点, ¥2,655,760）</a:t>
+              <a:t>コンフォートホテル成田（8.53点, ¥2,655,760）</a:t>
             </a:r>
             <a:endParaRPr lang="en-US" sz="800" dirty="0"/>
           </a:p>
@@ -17847,7 +17847,7 @@
                 <a:ea typeface="Arial" pitchFamily="34" charset="-122"/>
                 <a:cs typeface="Arial" pitchFamily="34" charset="-120"/>
               </a:rPr>
-              <a:t>コンフォートイン六本木（8.15点, ¥2,842,630）</a:t>
+              <a:t>コンフォートイン六本木（8.16点, ¥2,842,630）</a:t>
             </a:r>
             <a:endParaRPr lang="en-US" sz="800" dirty="0"/>
           </a:p>
@@ -17864,7 +17864,7 @@
                 <a:ea typeface="Arial" pitchFamily="34" charset="-122"/>
                 <a:cs typeface="Arial" pitchFamily="34" charset="-120"/>
               </a:rPr>
-              <a:t>アパホテル相模原橋本駅東（8.1点, ¥2,698,420）</a:t>
+              <a:t>アパホテル相模原橋本駅東（8.13点, ¥2,698,420）</a:t>
             </a:r>
             <a:endParaRPr lang="en-US" sz="800" dirty="0"/>
           </a:p>
@@ -18028,7 +18028,7 @@
                 <a:ea typeface="Arial" pitchFamily="34" charset="-122"/>
                 <a:cs typeface="Arial" pitchFamily="34" charset="-120"/>
               </a:rPr>
-              <a:t>コンフォートホテル博多（7.79点, ¥5,764,630）</a:t>
+              <a:t>コンフォートホテル博多（7.72点, ¥5,764,630）</a:t>
             </a:r>
             <a:endParaRPr lang="en-US" sz="800" dirty="0"/>
           </a:p>
@@ -18045,7 +18045,7 @@
                 <a:ea typeface="Arial" pitchFamily="34" charset="-122"/>
                 <a:cs typeface="Arial" pitchFamily="34" charset="-120"/>
               </a:rPr>
-              <a:t>アパホテル蒲田駅東（7.45点, ¥4,679,520）</a:t>
+              <a:t>アパホテル蒲田駅東（7.43点, ¥4,679,520）</a:t>
             </a:r>
             <a:endParaRPr lang="en-US" sz="800" dirty="0"/>
           </a:p>
@@ -18062,7 +18062,7 @@
                 <a:ea typeface="Arial" pitchFamily="34" charset="-122"/>
                 <a:cs typeface="Arial" pitchFamily="34" charset="-120"/>
               </a:rPr>
-              <a:t>チサンホテル浜松町（7.11点, ¥5,578,650）</a:t>
+              <a:t>チサンホテル浜松町（7.08点, ¥5,578,650）</a:t>
             </a:r>
             <a:endParaRPr lang="en-US" sz="800" dirty="0"/>
           </a:p>
@@ -18226,7 +18226,7 @@
                 <a:ea typeface="Arial" pitchFamily="34" charset="-122"/>
                 <a:cs typeface="Arial" pitchFamily="34" charset="-120"/>
               </a:rPr>
-              <a:t>コンフォートホテル横浜関内（7.46点, ¥4,051,890）</a:t>
+              <a:t>コンフォートホテル横浜関内（7.41点, ¥4,051,890）</a:t>
             </a:r>
             <a:endParaRPr lang="en-US" sz="800" dirty="0"/>
           </a:p>
@@ -23510,9 +23510,9 @@
                   <a:srgbClr val="333333"/>
                 </a:solidFill>
               </a:rPr>
-              <a:t>  コンフォートスイーツ東京ベイ（9.21点）
-  第一イン池袋（9.08点）
-  京成リッチモンドホテル東京錦糸町（9.05点）
+              <a:t>  コンフォートスイーツ東京ベイ（9.24点）
+  第一イン池袋（9.12点）
+  京成リッチモンドホテル東京錦糸町（9.06点）
 </a:t>
             </a:r>
             <a:pPr indent="0" marL="0">
@@ -23536,8 +23536,8 @@
                   <a:srgbClr val="333333"/>
                 </a:solidFill>
               </a:rPr>
-              <a:t>  アパホテル蒲田駅東（7.45点）
-  チサンホテル浜松町（7.11点）
+              <a:t>  コンフォートホテル横浜関内（7.41点）
+  チサンホテル浜松町（7.08点）
   コートホテル新横浜（7.03点）
 </a:t>
             </a:r>

--- a/納品レポート/PRIMECHANGE戦略レポート/PRIMECHANGE_CS向上戦略提案書.pptx
+++ b/納品レポート/PRIMECHANGE戦略レポート/PRIMECHANGE_CS向上戦略提案書.pptx
@@ -2274,7 +2274,7 @@
                 <a:ea typeface="Arial" pitchFamily="34" charset="-122"/>
                 <a:cs typeface="Arial" pitchFamily="34" charset="-120"/>
               </a:rPr>
-              <a:t>対象：19ホテル | 月間総売上：¥99,847,777 | 口コミ：2323件</a:t>
+              <a:t>対象：19ホテル | 月間総売上：¥99,847,777 | 口コミ：2355件</a:t>
             </a:r>
             <a:endParaRPr lang="en-US" sz="1100" dirty="0"/>
           </a:p>
@@ -15175,7 +15175,7 @@
                 <a:ea typeface="Arial" pitchFamily="34" charset="-122"/>
                 <a:cs typeface="Arial" pitchFamily="34" charset="-120"/>
               </a:rPr>
-              <a:t>4.4%</a:t>
+              <a:t>4.5%</a:t>
             </a:r>
             <a:endParaRPr lang="en-US" sz="2800" dirty="0"/>
           </a:p>
@@ -17496,7 +17496,7 @@
                 <a:ea typeface="Arial" pitchFamily="34" charset="-122"/>
                 <a:cs typeface="Arial" pitchFamily="34" charset="-120"/>
               </a:rPr>
-              <a:t>コンフォートスイーツ東京ベイ（9.24点, ¥13,228,360）</a:t>
+              <a:t>コンフォートスイーツ東京ベイ（9.22点, ¥13,228,360）</a:t>
             </a:r>
             <a:endParaRPr lang="en-US" sz="800" dirty="0"/>
           </a:p>
@@ -17513,7 +17513,7 @@
                 <a:ea typeface="Arial" pitchFamily="34" charset="-122"/>
                 <a:cs typeface="Arial" pitchFamily="34" charset="-120"/>
               </a:rPr>
-              <a:t>京成リッチモンドホテル東京錦糸町（9.06点, ¥4,791,800）</a:t>
+              <a:t>京成リッチモンドホテル東京錦糸町（9.08点, ¥4,791,800）</a:t>
             </a:r>
             <a:endParaRPr lang="en-US" sz="800" dirty="0"/>
           </a:p>
@@ -17530,7 +17530,7 @@
                 <a:ea typeface="Arial" pitchFamily="34" charset="-122"/>
                 <a:cs typeface="Arial" pitchFamily="34" charset="-120"/>
               </a:rPr>
-              <a:t>ホテルコメント横浜関内（8.88点, ¥4,463,320）</a:t>
+              <a:t>ホテルコメント横浜関内（8.9点, ¥4,463,320）</a:t>
             </a:r>
             <a:endParaRPr lang="en-US" sz="800" dirty="0"/>
           </a:p>
@@ -17547,7 +17547,7 @@
                 <a:ea typeface="Arial" pitchFamily="34" charset="-122"/>
                 <a:cs typeface="Arial" pitchFamily="34" charset="-120"/>
               </a:rPr>
-              <a:t>ダイワロイネットホテル東京大崎（8.84点, ¥5,203,037）</a:t>
+              <a:t>ダイワロイネットホテル東京大崎（8.86点, ¥5,203,037）</a:t>
             </a:r>
             <a:endParaRPr lang="en-US" sz="800" dirty="0"/>
           </a:p>
@@ -17564,7 +17564,7 @@
                 <a:ea typeface="Arial" pitchFamily="34" charset="-122"/>
                 <a:cs typeface="Arial" pitchFamily="34" charset="-120"/>
               </a:rPr>
-              <a:t>川崎日航ホテル（8.71点, ¥7,168,120）</a:t>
+              <a:t>ハートンホテル東品川（8.72点, ¥11,211,550）</a:t>
             </a:r>
             <a:endParaRPr lang="en-US" sz="800" dirty="0"/>
           </a:p>
@@ -17581,7 +17581,7 @@
                 <a:ea typeface="Arial" pitchFamily="34" charset="-122"/>
                 <a:cs typeface="Arial" pitchFamily="34" charset="-120"/>
               </a:rPr>
-              <a:t>ハートンホテル東品川（8.69点, ¥11,211,550）</a:t>
+              <a:t>川崎日航ホテル（8.68点, ¥7,168,120）</a:t>
             </a:r>
             <a:endParaRPr lang="en-US" sz="800" dirty="0"/>
           </a:p>
@@ -17598,7 +17598,7 @@
                 <a:ea typeface="Arial" pitchFamily="34" charset="-122"/>
                 <a:cs typeface="Arial" pitchFamily="34" charset="-120"/>
               </a:rPr>
-              <a:t>変なホテル東京羽田（8.29点, ¥5,358,150）</a:t>
+              <a:t>変なホテル東京羽田（8.3点, ¥5,358,150）</a:t>
             </a:r>
             <a:endParaRPr lang="en-US" sz="800" dirty="0"/>
           </a:p>
@@ -17762,7 +17762,7 @@
                 <a:ea typeface="Arial" pitchFamily="34" charset="-122"/>
                 <a:cs typeface="Arial" pitchFamily="34" charset="-120"/>
               </a:rPr>
-              <a:t>第一イン池袋（9.12点, ¥4,310,610）</a:t>
+              <a:t>第一イン池袋（9.13点, ¥4,310,610）</a:t>
             </a:r>
             <a:endParaRPr lang="en-US" sz="800" dirty="0"/>
           </a:p>
@@ -17779,7 +17779,7 @@
                 <a:ea typeface="Arial" pitchFamily="34" charset="-122"/>
                 <a:cs typeface="Arial" pitchFamily="34" charset="-120"/>
               </a:rPr>
-              <a:t>コンフォートホテルERA東京東神田（8.95点, ¥4,047,280）</a:t>
+              <a:t>コンフォートホテルERA東京東神田（8.92点, ¥4,047,280）</a:t>
             </a:r>
             <a:endParaRPr lang="en-US" sz="800" dirty="0"/>
           </a:p>
@@ -17813,7 +17813,7 @@
                 <a:ea typeface="Arial" pitchFamily="34" charset="-122"/>
                 <a:cs typeface="Arial" pitchFamily="34" charset="-120"/>
               </a:rPr>
-              <a:t>リッチモンドホテル東京目白（8.68点, ¥3,663,440）</a:t>
+              <a:t>リッチモンドホテル東京目白（8.7点, ¥3,663,440）</a:t>
             </a:r>
             <a:endParaRPr lang="en-US" sz="800" dirty="0"/>
           </a:p>
@@ -17830,7 +17830,7 @@
                 <a:ea typeface="Arial" pitchFamily="34" charset="-122"/>
                 <a:cs typeface="Arial" pitchFamily="34" charset="-120"/>
               </a:rPr>
-              <a:t>コンフォートホテル成田（8.53点, ¥2,655,760）</a:t>
+              <a:t>コンフォートホテル成田（8.5点, ¥2,655,760）</a:t>
             </a:r>
             <a:endParaRPr lang="en-US" sz="800" dirty="0"/>
           </a:p>
@@ -17847,7 +17847,7 @@
                 <a:ea typeface="Arial" pitchFamily="34" charset="-122"/>
                 <a:cs typeface="Arial" pitchFamily="34" charset="-120"/>
               </a:rPr>
-              <a:t>コンフォートイン六本木（8.16点, ¥2,842,630）</a:t>
+              <a:t>コンフォートイン六本木（8.22点, ¥2,842,630）</a:t>
             </a:r>
             <a:endParaRPr lang="en-US" sz="800" dirty="0"/>
           </a:p>
@@ -18028,7 +18028,7 @@
                 <a:ea typeface="Arial" pitchFamily="34" charset="-122"/>
                 <a:cs typeface="Arial" pitchFamily="34" charset="-120"/>
               </a:rPr>
-              <a:t>コンフォートホテル博多（7.72点, ¥5,764,630）</a:t>
+              <a:t>コンフォートホテル博多（7.73点, ¥5,764,630）</a:t>
             </a:r>
             <a:endParaRPr lang="en-US" sz="800" dirty="0"/>
           </a:p>
@@ -18045,7 +18045,7 @@
                 <a:ea typeface="Arial" pitchFamily="34" charset="-122"/>
                 <a:cs typeface="Arial" pitchFamily="34" charset="-120"/>
               </a:rPr>
-              <a:t>アパホテル蒲田駅東（7.43点, ¥4,679,520）</a:t>
+              <a:t>アパホテル蒲田駅東（7.38点, ¥4,679,520）</a:t>
             </a:r>
             <a:endParaRPr lang="en-US" sz="800" dirty="0"/>
           </a:p>
@@ -18062,7 +18062,7 @@
                 <a:ea typeface="Arial" pitchFamily="34" charset="-122"/>
                 <a:cs typeface="Arial" pitchFamily="34" charset="-120"/>
               </a:rPr>
-              <a:t>チサンホテル浜松町（7.08点, ¥5,578,650）</a:t>
+              <a:t>チサンホテル浜松町（7.1点, ¥5,578,650）</a:t>
             </a:r>
             <a:endParaRPr lang="en-US" sz="800" dirty="0"/>
           </a:p>
@@ -18226,7 +18226,7 @@
                 <a:ea typeface="Arial" pitchFamily="34" charset="-122"/>
                 <a:cs typeface="Arial" pitchFamily="34" charset="-120"/>
               </a:rPr>
-              <a:t>コンフォートホテル横浜関内（7.41点, ¥4,051,890）</a:t>
+              <a:t>コンフォートホテル横浜関内（7.43点, ¥4,051,890）</a:t>
             </a:r>
             <a:endParaRPr lang="en-US" sz="800" dirty="0"/>
           </a:p>
@@ -23510,9 +23510,9 @@
                   <a:srgbClr val="333333"/>
                 </a:solidFill>
               </a:rPr>
-              <a:t>  コンフォートスイーツ東京ベイ（9.24点）
-  第一イン池袋（9.12点）
-  京成リッチモンドホテル東京錦糸町（9.06点）
+              <a:t>  コンフォートスイーツ東京ベイ（9.22点）
+  第一イン池袋（9.13点）
+  京成リッチモンドホテル東京錦糸町（9.08点）
 </a:t>
             </a:r>
             <a:pPr indent="0" marL="0">
@@ -23536,8 +23536,8 @@
                   <a:srgbClr val="333333"/>
                 </a:solidFill>
               </a:rPr>
-              <a:t>  コンフォートホテル横浜関内（7.41点）
-  チサンホテル浜松町（7.08点）
+              <a:t>  アパホテル蒲田駅東（7.38点）
+  チサンホテル浜松町（7.1点）
   コートホテル新横浜（7.03点）
 </a:t>
             </a:r>

--- a/納品レポート/PRIMECHANGE戦略レポート/PRIMECHANGE_CS向上戦略提案書.pptx
+++ b/納品レポート/PRIMECHANGE戦略レポート/PRIMECHANGE_CS向上戦略提案書.pptx
@@ -2274,7 +2274,7 @@
                 <a:ea typeface="Arial" pitchFamily="34" charset="-122"/>
                 <a:cs typeface="Arial" pitchFamily="34" charset="-120"/>
               </a:rPr>
-              <a:t>対象：19ホテル | 月間総売上：¥99,847,777 | 口コミ：2355件</a:t>
+              <a:t>対象：19ホテル | 月間総売上：¥99,847,777 | 口コミ：2389件</a:t>
             </a:r>
             <a:endParaRPr lang="en-US" sz="1100" dirty="0"/>
           </a:p>
@@ -14925,7 +14925,7 @@
                 <a:ea typeface="Arial" pitchFamily="34" charset="-122"/>
                 <a:cs typeface="Arial" pitchFamily="34" charset="-120"/>
               </a:rPr>
-              <a:t>8.39</a:t>
+              <a:t>8.41</a:t>
             </a:r>
             <a:endParaRPr lang="en-US" sz="2800" dirty="0"/>
           </a:p>
@@ -15175,7 +15175,7 @@
                 <a:ea typeface="Arial" pitchFamily="34" charset="-122"/>
                 <a:cs typeface="Arial" pitchFamily="34" charset="-120"/>
               </a:rPr>
-              <a:t>4.5%</a:t>
+              <a:t>4.4%</a:t>
             </a:r>
             <a:endParaRPr lang="en-US" sz="2800" dirty="0"/>
           </a:p>
@@ -16916,7 +16916,7 @@
                   <a:srgbClr val="333333"/>
                 </a:solidFill>
               </a:rPr>
-              <a:t>8.39点</a:t>
+              <a:t>8.41点</a:t>
             </a:r>
             <a:pPr indent="0" marL="0">
               <a:buNone/>
@@ -17496,7 +17496,7 @@
                 <a:ea typeface="Arial" pitchFamily="34" charset="-122"/>
                 <a:cs typeface="Arial" pitchFamily="34" charset="-120"/>
               </a:rPr>
-              <a:t>コンフォートスイーツ東京ベイ（9.22点, ¥13,228,360）</a:t>
+              <a:t>コンフォートスイーツ東京ベイ（9.21点, ¥13,228,360）</a:t>
             </a:r>
             <a:endParaRPr lang="en-US" sz="800" dirty="0"/>
           </a:p>
@@ -17513,7 +17513,7 @@
                 <a:ea typeface="Arial" pitchFamily="34" charset="-122"/>
                 <a:cs typeface="Arial" pitchFamily="34" charset="-120"/>
               </a:rPr>
-              <a:t>京成リッチモンドホテル東京錦糸町（9.08点, ¥4,791,800）</a:t>
+              <a:t>京成リッチモンドホテル東京錦糸町（9.12点, ¥4,791,800）</a:t>
             </a:r>
             <a:endParaRPr lang="en-US" sz="800" dirty="0"/>
           </a:p>
@@ -17530,7 +17530,7 @@
                 <a:ea typeface="Arial" pitchFamily="34" charset="-122"/>
                 <a:cs typeface="Arial" pitchFamily="34" charset="-120"/>
               </a:rPr>
-              <a:t>ホテルコメント横浜関内（8.9点, ¥4,463,320）</a:t>
+              <a:t>ホテルコメント横浜関内（8.87点, ¥4,463,320）</a:t>
             </a:r>
             <a:endParaRPr lang="en-US" sz="800" dirty="0"/>
           </a:p>
@@ -17547,7 +17547,7 @@
                 <a:ea typeface="Arial" pitchFamily="34" charset="-122"/>
                 <a:cs typeface="Arial" pitchFamily="34" charset="-120"/>
               </a:rPr>
-              <a:t>ダイワロイネットホテル東京大崎（8.86点, ¥5,203,037）</a:t>
+              <a:t>ダイワロイネットホテル東京大崎（8.83点, ¥5,203,037）</a:t>
             </a:r>
             <a:endParaRPr lang="en-US" sz="800" dirty="0"/>
           </a:p>
@@ -17564,7 +17564,7 @@
                 <a:ea typeface="Arial" pitchFamily="34" charset="-122"/>
                 <a:cs typeface="Arial" pitchFamily="34" charset="-120"/>
               </a:rPr>
-              <a:t>ハートンホテル東品川（8.72点, ¥11,211,550）</a:t>
+              <a:t>川崎日航ホテル（8.72点, ¥7,168,120）</a:t>
             </a:r>
             <a:endParaRPr lang="en-US" sz="800" dirty="0"/>
           </a:p>
@@ -17581,7 +17581,7 @@
                 <a:ea typeface="Arial" pitchFamily="34" charset="-122"/>
                 <a:cs typeface="Arial" pitchFamily="34" charset="-120"/>
               </a:rPr>
-              <a:t>川崎日航ホテル（8.68点, ¥7,168,120）</a:t>
+              <a:t>ハートンホテル東品川（8.67点, ¥11,211,550）</a:t>
             </a:r>
             <a:endParaRPr lang="en-US" sz="800" dirty="0"/>
           </a:p>
@@ -17598,7 +17598,7 @@
                 <a:ea typeface="Arial" pitchFamily="34" charset="-122"/>
                 <a:cs typeface="Arial" pitchFamily="34" charset="-120"/>
               </a:rPr>
-              <a:t>変なホテル東京羽田（8.3点, ¥5,358,150）</a:t>
+              <a:t>変なホテル東京羽田（8.28点, ¥5,358,150）</a:t>
             </a:r>
             <a:endParaRPr lang="en-US" sz="800" dirty="0"/>
           </a:p>
@@ -17762,7 +17762,7 @@
                 <a:ea typeface="Arial" pitchFamily="34" charset="-122"/>
                 <a:cs typeface="Arial" pitchFamily="34" charset="-120"/>
               </a:rPr>
-              <a:t>第一イン池袋（9.13点, ¥4,310,610）</a:t>
+              <a:t>第一イン池袋（9.16点, ¥4,310,610）</a:t>
             </a:r>
             <a:endParaRPr lang="en-US" sz="800" dirty="0"/>
           </a:p>
@@ -17796,7 +17796,7 @@
                 <a:ea typeface="Arial" pitchFamily="34" charset="-122"/>
                 <a:cs typeface="Arial" pitchFamily="34" charset="-120"/>
               </a:rPr>
-              <a:t>ホテルケヤキゲート東京府中（8.74点, ¥4,425,395）</a:t>
+              <a:t>ホテルケヤキゲート東京府中（8.71点, ¥4,425,395）</a:t>
             </a:r>
             <a:endParaRPr lang="en-US" sz="800" dirty="0"/>
           </a:p>
@@ -17813,7 +17813,7 @@
                 <a:ea typeface="Arial" pitchFamily="34" charset="-122"/>
                 <a:cs typeface="Arial" pitchFamily="34" charset="-120"/>
               </a:rPr>
-              <a:t>リッチモンドホテル東京目白（8.7点, ¥3,663,440）</a:t>
+              <a:t>リッチモンドホテル東京目白（8.71点, ¥3,663,440）</a:t>
             </a:r>
             <a:endParaRPr lang="en-US" sz="800" dirty="0"/>
           </a:p>
@@ -17830,7 +17830,7 @@
                 <a:ea typeface="Arial" pitchFamily="34" charset="-122"/>
                 <a:cs typeface="Arial" pitchFamily="34" charset="-120"/>
               </a:rPr>
-              <a:t>コンフォートホテル成田（8.5点, ¥2,655,760）</a:t>
+              <a:t>コンフォートホテル成田（8.53点, ¥2,655,760）</a:t>
             </a:r>
             <a:endParaRPr lang="en-US" sz="800" dirty="0"/>
           </a:p>
@@ -17847,7 +17847,7 @@
                 <a:ea typeface="Arial" pitchFamily="34" charset="-122"/>
                 <a:cs typeface="Arial" pitchFamily="34" charset="-120"/>
               </a:rPr>
-              <a:t>コンフォートイン六本木（8.22点, ¥2,842,630）</a:t>
+              <a:t>コンフォートイン六本木（8.23点, ¥2,842,630）</a:t>
             </a:r>
             <a:endParaRPr lang="en-US" sz="800" dirty="0"/>
           </a:p>
@@ -17864,7 +17864,7 @@
                 <a:ea typeface="Arial" pitchFamily="34" charset="-122"/>
                 <a:cs typeface="Arial" pitchFamily="34" charset="-120"/>
               </a:rPr>
-              <a:t>アパホテル相模原橋本駅東（8.13点, ¥2,698,420）</a:t>
+              <a:t>アパホテル相模原橋本駅東（8.16点, ¥2,698,420）</a:t>
             </a:r>
             <a:endParaRPr lang="en-US" sz="800" dirty="0"/>
           </a:p>
@@ -18028,7 +18028,7 @@
                 <a:ea typeface="Arial" pitchFamily="34" charset="-122"/>
                 <a:cs typeface="Arial" pitchFamily="34" charset="-120"/>
               </a:rPr>
-              <a:t>コンフォートホテル博多（7.73点, ¥5,764,630）</a:t>
+              <a:t>コンフォートホテル博多（7.83点, ¥5,764,630）</a:t>
             </a:r>
             <a:endParaRPr lang="en-US" sz="800" dirty="0"/>
           </a:p>
@@ -18045,7 +18045,7 @@
                 <a:ea typeface="Arial" pitchFamily="34" charset="-122"/>
                 <a:cs typeface="Arial" pitchFamily="34" charset="-120"/>
               </a:rPr>
-              <a:t>アパホテル蒲田駅東（7.38点, ¥4,679,520）</a:t>
+              <a:t>アパホテル蒲田駅東（7.39点, ¥4,679,520）</a:t>
             </a:r>
             <a:endParaRPr lang="en-US" sz="800" dirty="0"/>
           </a:p>
@@ -18062,7 +18062,7 @@
                 <a:ea typeface="Arial" pitchFamily="34" charset="-122"/>
                 <a:cs typeface="Arial" pitchFamily="34" charset="-120"/>
               </a:rPr>
-              <a:t>チサンホテル浜松町（7.1点, ¥5,578,650）</a:t>
+              <a:t>チサンホテル浜松町（7.09点, ¥5,578,650）</a:t>
             </a:r>
             <a:endParaRPr lang="en-US" sz="800" dirty="0"/>
           </a:p>
@@ -18243,7 +18243,7 @@
                 <a:ea typeface="Arial" pitchFamily="34" charset="-122"/>
                 <a:cs typeface="Arial" pitchFamily="34" charset="-120"/>
               </a:rPr>
-              <a:t>コートホテル新横浜（7.03点, ¥3,705,215）</a:t>
+              <a:t>コートホテル新横浜（7.12点, ¥3,705,215）</a:t>
             </a:r>
             <a:endParaRPr lang="en-US" sz="800" dirty="0"/>
           </a:p>
@@ -23510,9 +23510,9 @@
                   <a:srgbClr val="333333"/>
                 </a:solidFill>
               </a:rPr>
-              <a:t>  コンフォートスイーツ東京ベイ（9.22点）
-  第一イン池袋（9.13点）
-  京成リッチモンドホテル東京錦糸町（9.08点）
+              <a:t>  コンフォートスイーツ東京ベイ（9.21点）
+  第一イン池袋（9.16点）
+  京成リッチモンドホテル東京錦糸町（9.12点）
 </a:t>
             </a:r>
             <a:pPr indent="0" marL="0">
@@ -23536,9 +23536,9 @@
                   <a:srgbClr val="333333"/>
                 </a:solidFill>
               </a:rPr>
-              <a:t>  アパホテル蒲田駅東（7.38点）
-  チサンホテル浜松町（7.1点）
-  コートホテル新横浜（7.03点）
+              <a:t>  アパホテル蒲田駅東（7.39点）
+  コートホテル新横浜（7.12点）
+  チサンホテル浜松町（7.09点）
 </a:t>
             </a:r>
             <a:pPr indent="0" marL="0">

--- a/納品レポート/PRIMECHANGE戦略レポート/PRIMECHANGE_CS向上戦略提案書.pptx
+++ b/納品レポート/PRIMECHANGE戦略レポート/PRIMECHANGE_CS向上戦略提案書.pptx
@@ -2274,7 +2274,7 @@
                 <a:ea typeface="Arial" pitchFamily="34" charset="-122"/>
                 <a:cs typeface="Arial" pitchFamily="34" charset="-120"/>
               </a:rPr>
-              <a:t>対象：19ホテル | 月間総売上：¥99,847,777 | 口コミ：2389件</a:t>
+              <a:t>対象：19ホテル | 月間総売上：¥99,847,777 | 口コミ：2400件</a:t>
             </a:r>
             <a:endParaRPr lang="en-US" sz="1100" dirty="0"/>
           </a:p>
@@ -17513,7 +17513,7 @@
                 <a:ea typeface="Arial" pitchFamily="34" charset="-122"/>
                 <a:cs typeface="Arial" pitchFamily="34" charset="-120"/>
               </a:rPr>
-              <a:t>京成リッチモンドホテル東京錦糸町（9.12点, ¥4,791,800）</a:t>
+              <a:t>京成リッチモンドホテル東京錦糸町（9.13点, ¥4,791,800）</a:t>
             </a:r>
             <a:endParaRPr lang="en-US" sz="800" dirty="0"/>
           </a:p>
@@ -17530,7 +17530,7 @@
                 <a:ea typeface="Arial" pitchFamily="34" charset="-122"/>
                 <a:cs typeface="Arial" pitchFamily="34" charset="-120"/>
               </a:rPr>
-              <a:t>ホテルコメント横浜関内（8.87点, ¥4,463,320）</a:t>
+              <a:t>ホテルコメント横浜関内（8.88点, ¥4,463,320）</a:t>
             </a:r>
             <a:endParaRPr lang="en-US" sz="800" dirty="0"/>
           </a:p>
@@ -17547,7 +17547,7 @@
                 <a:ea typeface="Arial" pitchFamily="34" charset="-122"/>
                 <a:cs typeface="Arial" pitchFamily="34" charset="-120"/>
               </a:rPr>
-              <a:t>ダイワロイネットホテル東京大崎（8.83点, ¥5,203,037）</a:t>
+              <a:t>ダイワロイネットホテル東京大崎（8.85点, ¥5,203,037）</a:t>
             </a:r>
             <a:endParaRPr lang="en-US" sz="800" dirty="0"/>
           </a:p>
@@ -17581,7 +17581,7 @@
                 <a:ea typeface="Arial" pitchFamily="34" charset="-122"/>
                 <a:cs typeface="Arial" pitchFamily="34" charset="-120"/>
               </a:rPr>
-              <a:t>ハートンホテル東品川（8.67点, ¥11,211,550）</a:t>
+              <a:t>ハートンホテル東品川（8.65点, ¥11,211,550）</a:t>
             </a:r>
             <a:endParaRPr lang="en-US" sz="800" dirty="0"/>
           </a:p>
@@ -17598,7 +17598,7 @@
                 <a:ea typeface="Arial" pitchFamily="34" charset="-122"/>
                 <a:cs typeface="Arial" pitchFamily="34" charset="-120"/>
               </a:rPr>
-              <a:t>変なホテル東京羽田（8.28点, ¥5,358,150）</a:t>
+              <a:t>変なホテル東京羽田（8.29点, ¥5,358,150）</a:t>
             </a:r>
             <a:endParaRPr lang="en-US" sz="800" dirty="0"/>
           </a:p>
@@ -17779,7 +17779,7 @@
                 <a:ea typeface="Arial" pitchFamily="34" charset="-122"/>
                 <a:cs typeface="Arial" pitchFamily="34" charset="-120"/>
               </a:rPr>
-              <a:t>コンフォートホテルERA東京東神田（8.92点, ¥4,047,280）</a:t>
+              <a:t>コンフォートホテルERA東京東神田（8.89点, ¥4,047,280）</a:t>
             </a:r>
             <a:endParaRPr lang="en-US" sz="800" dirty="0"/>
           </a:p>
@@ -17796,7 +17796,7 @@
                 <a:ea typeface="Arial" pitchFamily="34" charset="-122"/>
                 <a:cs typeface="Arial" pitchFamily="34" charset="-120"/>
               </a:rPr>
-              <a:t>ホテルケヤキゲート東京府中（8.71点, ¥4,425,395）</a:t>
+              <a:t>リッチモンドホテル東京目白（8.72点, ¥3,663,440）</a:t>
             </a:r>
             <a:endParaRPr lang="en-US" sz="800" dirty="0"/>
           </a:p>
@@ -17813,7 +17813,7 @@
                 <a:ea typeface="Arial" pitchFamily="34" charset="-122"/>
                 <a:cs typeface="Arial" pitchFamily="34" charset="-120"/>
               </a:rPr>
-              <a:t>リッチモンドホテル東京目白（8.71点, ¥3,663,440）</a:t>
+              <a:t>ホテルケヤキゲート東京府中（8.71点, ¥4,425,395）</a:t>
             </a:r>
             <a:endParaRPr lang="en-US" sz="800" dirty="0"/>
           </a:p>
@@ -17864,7 +17864,7 @@
                 <a:ea typeface="Arial" pitchFamily="34" charset="-122"/>
                 <a:cs typeface="Arial" pitchFamily="34" charset="-120"/>
               </a:rPr>
-              <a:t>アパホテル相模原橋本駅東（8.16点, ¥2,698,420）</a:t>
+              <a:t>アパホテル相模原橋本駅東（8.17点, ¥2,698,420）</a:t>
             </a:r>
             <a:endParaRPr lang="en-US" sz="800" dirty="0"/>
           </a:p>
@@ -18062,7 +18062,7 @@
                 <a:ea typeface="Arial" pitchFamily="34" charset="-122"/>
                 <a:cs typeface="Arial" pitchFamily="34" charset="-120"/>
               </a:rPr>
-              <a:t>チサンホテル浜松町（7.09点, ¥5,578,650）</a:t>
+              <a:t>チサンホテル浜松町（7.12点, ¥5,578,650）</a:t>
             </a:r>
             <a:endParaRPr lang="en-US" sz="800" dirty="0"/>
           </a:p>
@@ -23512,7 +23512,7 @@
               </a:rPr>
               <a:t>  コンフォートスイーツ東京ベイ（9.21点）
   第一イン池袋（9.16点）
-  京成リッチモンドホテル東京錦糸町（9.12点）
+  京成リッチモンドホテル東京錦糸町（9.13点）
 </a:t>
             </a:r>
             <a:pPr indent="0" marL="0">
@@ -23537,8 +23537,8 @@
                 </a:solidFill>
               </a:rPr>
               <a:t>  アパホテル蒲田駅東（7.39点）
+  チサンホテル浜松町（7.12点）
   コートホテル新横浜（7.12点）
-  チサンホテル浜松町（7.09点）
 </a:t>
             </a:r>
             <a:pPr indent="0" marL="0">

--- a/納品レポート/PRIMECHANGE戦略レポート/PRIMECHANGE_CS向上戦略提案書.pptx
+++ b/納品レポート/PRIMECHANGE戦略レポート/PRIMECHANGE_CS向上戦略提案書.pptx
@@ -2274,7 +2274,7 @@
                 <a:ea typeface="Arial" pitchFamily="34" charset="-122"/>
                 <a:cs typeface="Arial" pitchFamily="34" charset="-120"/>
               </a:rPr>
-              <a:t>対象：19ホテル | 月間総売上：¥99,847,777 | 口コミ：2400件</a:t>
+              <a:t>対象：19ホテル | 月間総売上：¥99,847,777 | 口コミ：2426件</a:t>
             </a:r>
             <a:endParaRPr lang="en-US" sz="1100" dirty="0"/>
           </a:p>
@@ -15175,7 +15175,7 @@
                 <a:ea typeface="Arial" pitchFamily="34" charset="-122"/>
                 <a:cs typeface="Arial" pitchFamily="34" charset="-120"/>
               </a:rPr>
-              <a:t>4.4%</a:t>
+              <a:t>4.3%</a:t>
             </a:r>
             <a:endParaRPr lang="en-US" sz="2800" dirty="0"/>
           </a:p>
@@ -17496,7 +17496,7 @@
                 <a:ea typeface="Arial" pitchFamily="34" charset="-122"/>
                 <a:cs typeface="Arial" pitchFamily="34" charset="-120"/>
               </a:rPr>
-              <a:t>コンフォートスイーツ東京ベイ（9.21点, ¥13,228,360）</a:t>
+              <a:t>コンフォートスイーツ東京ベイ（9.2点, ¥13,228,360）</a:t>
             </a:r>
             <a:endParaRPr lang="en-US" sz="800" dirty="0"/>
           </a:p>
@@ -17513,7 +17513,7 @@
                 <a:ea typeface="Arial" pitchFamily="34" charset="-122"/>
                 <a:cs typeface="Arial" pitchFamily="34" charset="-120"/>
               </a:rPr>
-              <a:t>京成リッチモンドホテル東京錦糸町（9.13点, ¥4,791,800）</a:t>
+              <a:t>京成リッチモンドホテル東京錦糸町（9.15点, ¥4,791,800）</a:t>
             </a:r>
             <a:endParaRPr lang="en-US" sz="800" dirty="0"/>
           </a:p>
@@ -17547,7 +17547,7 @@
                 <a:ea typeface="Arial" pitchFamily="34" charset="-122"/>
                 <a:cs typeface="Arial" pitchFamily="34" charset="-120"/>
               </a:rPr>
-              <a:t>ダイワロイネットホテル東京大崎（8.85点, ¥5,203,037）</a:t>
+              <a:t>ダイワロイネットホテル東京大崎（8.87点, ¥5,203,037）</a:t>
             </a:r>
             <a:endParaRPr lang="en-US" sz="800" dirty="0"/>
           </a:p>
@@ -17581,7 +17581,7 @@
                 <a:ea typeface="Arial" pitchFamily="34" charset="-122"/>
                 <a:cs typeface="Arial" pitchFamily="34" charset="-120"/>
               </a:rPr>
-              <a:t>ハートンホテル東品川（8.65点, ¥11,211,550）</a:t>
+              <a:t>ハートンホテル東品川（8.59点, ¥11,211,550）</a:t>
             </a:r>
             <a:endParaRPr lang="en-US" sz="800" dirty="0"/>
           </a:p>
@@ -17598,7 +17598,7 @@
                 <a:ea typeface="Arial" pitchFamily="34" charset="-122"/>
                 <a:cs typeface="Arial" pitchFamily="34" charset="-120"/>
               </a:rPr>
-              <a:t>変なホテル東京羽田（8.29点, ¥5,358,150）</a:t>
+              <a:t>変なホテル東京羽田（8.28点, ¥5,358,150）</a:t>
             </a:r>
             <a:endParaRPr lang="en-US" sz="800" dirty="0"/>
           </a:p>
@@ -17762,7 +17762,7 @@
                 <a:ea typeface="Arial" pitchFamily="34" charset="-122"/>
                 <a:cs typeface="Arial" pitchFamily="34" charset="-120"/>
               </a:rPr>
-              <a:t>第一イン池袋（9.16点, ¥4,310,610）</a:t>
+              <a:t>第一イン池袋（9.18点, ¥4,310,610）</a:t>
             </a:r>
             <a:endParaRPr lang="en-US" sz="800" dirty="0"/>
           </a:p>
@@ -17779,7 +17779,7 @@
                 <a:ea typeface="Arial" pitchFamily="34" charset="-122"/>
                 <a:cs typeface="Arial" pitchFamily="34" charset="-120"/>
               </a:rPr>
-              <a:t>コンフォートホテルERA東京東神田（8.89点, ¥4,047,280）</a:t>
+              <a:t>コンフォートホテルERA東京東神田（8.9点, ¥4,047,280）</a:t>
             </a:r>
             <a:endParaRPr lang="en-US" sz="800" dirty="0"/>
           </a:p>
@@ -17796,7 +17796,7 @@
                 <a:ea typeface="Arial" pitchFamily="34" charset="-122"/>
                 <a:cs typeface="Arial" pitchFamily="34" charset="-120"/>
               </a:rPr>
-              <a:t>リッチモンドホテル東京目白（8.72点, ¥3,663,440）</a:t>
+              <a:t>ホテルケヤキゲート東京府中（8.74点, ¥4,425,395）</a:t>
             </a:r>
             <a:endParaRPr lang="en-US" sz="800" dirty="0"/>
           </a:p>
@@ -17813,7 +17813,7 @@
                 <a:ea typeface="Arial" pitchFamily="34" charset="-122"/>
                 <a:cs typeface="Arial" pitchFamily="34" charset="-120"/>
               </a:rPr>
-              <a:t>ホテルケヤキゲート東京府中（8.71点, ¥4,425,395）</a:t>
+              <a:t>リッチモンドホテル東京目白（8.72点, ¥3,663,440）</a:t>
             </a:r>
             <a:endParaRPr lang="en-US" sz="800" dirty="0"/>
           </a:p>
@@ -17830,7 +17830,7 @@
                 <a:ea typeface="Arial" pitchFamily="34" charset="-122"/>
                 <a:cs typeface="Arial" pitchFamily="34" charset="-120"/>
               </a:rPr>
-              <a:t>コンフォートホテル成田（8.53点, ¥2,655,760）</a:t>
+              <a:t>コンフォートホテル成田（8.5点, ¥2,655,760）</a:t>
             </a:r>
             <a:endParaRPr lang="en-US" sz="800" dirty="0"/>
           </a:p>
@@ -18028,7 +18028,7 @@
                 <a:ea typeface="Arial" pitchFamily="34" charset="-122"/>
                 <a:cs typeface="Arial" pitchFamily="34" charset="-120"/>
               </a:rPr>
-              <a:t>コンフォートホテル博多（7.83点, ¥5,764,630）</a:t>
+              <a:t>コンフォートホテル博多（7.88点, ¥5,764,630）</a:t>
             </a:r>
             <a:endParaRPr lang="en-US" sz="800" dirty="0"/>
           </a:p>
@@ -18062,7 +18062,7 @@
                 <a:ea typeface="Arial" pitchFamily="34" charset="-122"/>
                 <a:cs typeface="Arial" pitchFamily="34" charset="-120"/>
               </a:rPr>
-              <a:t>チサンホテル浜松町（7.12点, ¥5,578,650）</a:t>
+              <a:t>チサンホテル浜松町（7.04点, ¥5,578,650）</a:t>
             </a:r>
             <a:endParaRPr lang="en-US" sz="800" dirty="0"/>
           </a:p>
@@ -18226,7 +18226,7 @@
                 <a:ea typeface="Arial" pitchFamily="34" charset="-122"/>
                 <a:cs typeface="Arial" pitchFamily="34" charset="-120"/>
               </a:rPr>
-              <a:t>コンフォートホテル横浜関内（7.43点, ¥4,051,890）</a:t>
+              <a:t>コンフォートホテル横浜関内（7.46点, ¥4,051,890）</a:t>
             </a:r>
             <a:endParaRPr lang="en-US" sz="800" dirty="0"/>
           </a:p>
@@ -23510,9 +23510,9 @@
                   <a:srgbClr val="333333"/>
                 </a:solidFill>
               </a:rPr>
-              <a:t>  コンフォートスイーツ東京ベイ（9.21点）
-  第一イン池袋（9.16点）
-  京成リッチモンドホテル東京錦糸町（9.13点）
+              <a:t>  コンフォートスイーツ東京ベイ（9.2点）
+  第一イン池袋（9.18点）
+  京成リッチモンドホテル東京錦糸町（9.15点）
 </a:t>
             </a:r>
             <a:pPr indent="0" marL="0">
@@ -23537,8 +23537,8 @@
                 </a:solidFill>
               </a:rPr>
               <a:t>  アパホテル蒲田駅東（7.39点）
-  チサンホテル浜松町（7.12点）
   コートホテル新横浜（7.12点）
+  チサンホテル浜松町（7.04点）
 </a:t>
             </a:r>
             <a:pPr indent="0" marL="0">

--- a/納品レポート/PRIMECHANGE戦略レポート/PRIMECHANGE_CS向上戦略提案書.pptx
+++ b/納品レポート/PRIMECHANGE戦略レポート/PRIMECHANGE_CS向上戦略提案書.pptx
@@ -2274,7 +2274,7 @@
                 <a:ea typeface="Arial" pitchFamily="34" charset="-122"/>
                 <a:cs typeface="Arial" pitchFamily="34" charset="-120"/>
               </a:rPr>
-              <a:t>対象：19ホテル | 月間総売上：¥99,847,777 | 口コミ：2426件</a:t>
+              <a:t>対象：19ホテル | 月間総売上：¥99,847,777 | 口コミ：2443件</a:t>
             </a:r>
             <a:endParaRPr lang="en-US" sz="1100" dirty="0"/>
           </a:p>
@@ -17496,7 +17496,7 @@
                 <a:ea typeface="Arial" pitchFamily="34" charset="-122"/>
                 <a:cs typeface="Arial" pitchFamily="34" charset="-120"/>
               </a:rPr>
-              <a:t>コンフォートスイーツ東京ベイ（9.2点, ¥13,228,360）</a:t>
+              <a:t>コンフォートスイーツ東京ベイ（9.22点, ¥13,228,360）</a:t>
             </a:r>
             <a:endParaRPr lang="en-US" sz="800" dirty="0"/>
           </a:p>
@@ -17513,7 +17513,7 @@
                 <a:ea typeface="Arial" pitchFamily="34" charset="-122"/>
                 <a:cs typeface="Arial" pitchFamily="34" charset="-120"/>
               </a:rPr>
-              <a:t>京成リッチモンドホテル東京錦糸町（9.15点, ¥4,791,800）</a:t>
+              <a:t>京成リッチモンドホテル東京錦糸町（9.12点, ¥4,791,800）</a:t>
             </a:r>
             <a:endParaRPr lang="en-US" sz="800" dirty="0"/>
           </a:p>
@@ -17564,7 +17564,7 @@
                 <a:ea typeface="Arial" pitchFamily="34" charset="-122"/>
                 <a:cs typeface="Arial" pitchFamily="34" charset="-120"/>
               </a:rPr>
-              <a:t>川崎日航ホテル（8.72点, ¥7,168,120）</a:t>
+              <a:t>川崎日航ホテル（8.68点, ¥7,168,120）</a:t>
             </a:r>
             <a:endParaRPr lang="en-US" sz="800" dirty="0"/>
           </a:p>
@@ -17598,7 +17598,7 @@
                 <a:ea typeface="Arial" pitchFamily="34" charset="-122"/>
                 <a:cs typeface="Arial" pitchFamily="34" charset="-120"/>
               </a:rPr>
-              <a:t>変なホテル東京羽田（8.28点, ¥5,358,150）</a:t>
+              <a:t>変なホテル東京羽田（8.3点, ¥5,358,150）</a:t>
             </a:r>
             <a:endParaRPr lang="en-US" sz="800" dirty="0"/>
           </a:p>
@@ -17813,7 +17813,7 @@
                 <a:ea typeface="Arial" pitchFamily="34" charset="-122"/>
                 <a:cs typeface="Arial" pitchFamily="34" charset="-120"/>
               </a:rPr>
-              <a:t>リッチモンドホテル東京目白（8.72点, ¥3,663,440）</a:t>
+              <a:t>リッチモンドホテル東京目白（8.73点, ¥3,663,440）</a:t>
             </a:r>
             <a:endParaRPr lang="en-US" sz="800" dirty="0"/>
           </a:p>
@@ -17847,7 +17847,7 @@
                 <a:ea typeface="Arial" pitchFamily="34" charset="-122"/>
                 <a:cs typeface="Arial" pitchFamily="34" charset="-120"/>
               </a:rPr>
-              <a:t>コンフォートイン六本木（8.23点, ¥2,842,630）</a:t>
+              <a:t>コンフォートイン六本木（8.19点, ¥2,842,630）</a:t>
             </a:r>
             <a:endParaRPr lang="en-US" sz="800" dirty="0"/>
           </a:p>
@@ -18045,7 +18045,7 @@
                 <a:ea typeface="Arial" pitchFamily="34" charset="-122"/>
                 <a:cs typeface="Arial" pitchFamily="34" charset="-120"/>
               </a:rPr>
-              <a:t>アパホテル蒲田駅東（7.39点, ¥4,679,520）</a:t>
+              <a:t>アパホテル蒲田駅東（7.34点, ¥4,679,520）</a:t>
             </a:r>
             <a:endParaRPr lang="en-US" sz="800" dirty="0"/>
           </a:p>
@@ -18062,7 +18062,7 @@
                 <a:ea typeface="Arial" pitchFamily="34" charset="-122"/>
                 <a:cs typeface="Arial" pitchFamily="34" charset="-120"/>
               </a:rPr>
-              <a:t>チサンホテル浜松町（7.04点, ¥5,578,650）</a:t>
+              <a:t>チサンホテル浜松町（7.02点, ¥5,578,650）</a:t>
             </a:r>
             <a:endParaRPr lang="en-US" sz="800" dirty="0"/>
           </a:p>
@@ -18226,7 +18226,7 @@
                 <a:ea typeface="Arial" pitchFamily="34" charset="-122"/>
                 <a:cs typeface="Arial" pitchFamily="34" charset="-120"/>
               </a:rPr>
-              <a:t>コンフォートホテル横浜関内（7.46点, ¥4,051,890）</a:t>
+              <a:t>コンフォートホテル横浜関内（7.52点, ¥4,051,890）</a:t>
             </a:r>
             <a:endParaRPr lang="en-US" sz="800" dirty="0"/>
           </a:p>
@@ -23510,9 +23510,9 @@
                   <a:srgbClr val="333333"/>
                 </a:solidFill>
               </a:rPr>
-              <a:t>  コンフォートスイーツ東京ベイ（9.2点）
+              <a:t>  コンフォートスイーツ東京ベイ（9.22点）
   第一イン池袋（9.18点）
-  京成リッチモンドホテル東京錦糸町（9.15点）
+  京成リッチモンドホテル東京錦糸町（9.12点）
 </a:t>
             </a:r>
             <a:pPr indent="0" marL="0">
@@ -23536,9 +23536,9 @@
                   <a:srgbClr val="333333"/>
                 </a:solidFill>
               </a:rPr>
-              <a:t>  アパホテル蒲田駅東（7.39点）
+              <a:t>  アパホテル蒲田駅東（7.34点）
   コートホテル新横浜（7.12点）
-  チサンホテル浜松町（7.04点）
+  チサンホテル浜松町（7.02点）
 </a:t>
             </a:r>
             <a:pPr indent="0" marL="0">

--- a/納品レポート/PRIMECHANGE戦略レポート/PRIMECHANGE_CS向上戦略提案書.pptx
+++ b/納品レポート/PRIMECHANGE戦略レポート/PRIMECHANGE_CS向上戦略提案書.pptx
@@ -2274,7 +2274,7 @@
                 <a:ea typeface="Arial" pitchFamily="34" charset="-122"/>
                 <a:cs typeface="Arial" pitchFamily="34" charset="-120"/>
               </a:rPr>
-              <a:t>対象：19ホテル | 月間総売上：¥99,847,777 | 口コミ：2443件</a:t>
+              <a:t>対象：19ホテル | 月間総売上：¥99,847,777 | 口コミ：2290件</a:t>
             </a:r>
             <a:endParaRPr lang="en-US" sz="1100" dirty="0"/>
           </a:p>
@@ -14925,7 +14925,7 @@
                 <a:ea typeface="Arial" pitchFamily="34" charset="-122"/>
                 <a:cs typeface="Arial" pitchFamily="34" charset="-120"/>
               </a:rPr>
-              <a:t>8.41</a:t>
+              <a:t>8.35</a:t>
             </a:r>
             <a:endParaRPr lang="en-US" sz="2800" dirty="0"/>
           </a:p>
@@ -15175,7 +15175,7 @@
                 <a:ea typeface="Arial" pitchFamily="34" charset="-122"/>
                 <a:cs typeface="Arial" pitchFamily="34" charset="-120"/>
               </a:rPr>
-              <a:t>4.3%</a:t>
+              <a:t>4.6%</a:t>
             </a:r>
             <a:endParaRPr lang="en-US" sz="2800" dirty="0"/>
           </a:p>
@@ -16916,7 +16916,7 @@
                   <a:srgbClr val="333333"/>
                 </a:solidFill>
               </a:rPr>
-              <a:t>8.41点</a:t>
+              <a:t>8.35点</a:t>
             </a:r>
             <a:pPr indent="0" marL="0">
               <a:buNone/>
@@ -17496,7 +17496,7 @@
                 <a:ea typeface="Arial" pitchFamily="34" charset="-122"/>
                 <a:cs typeface="Arial" pitchFamily="34" charset="-120"/>
               </a:rPr>
-              <a:t>コンフォートスイーツ東京ベイ（9.22点, ¥13,228,360）</a:t>
+              <a:t>京成リッチモンドホテル東京錦糸町（9.24点, ¥4,791,800）</a:t>
             </a:r>
             <a:endParaRPr lang="en-US" sz="800" dirty="0"/>
           </a:p>
@@ -17513,7 +17513,7 @@
                 <a:ea typeface="Arial" pitchFamily="34" charset="-122"/>
                 <a:cs typeface="Arial" pitchFamily="34" charset="-120"/>
               </a:rPr>
-              <a:t>京成リッチモンドホテル東京錦糸町（9.12点, ¥4,791,800）</a:t>
+              <a:t>コンフォートスイーツ東京ベイ（9.14点, ¥13,228,360）</a:t>
             </a:r>
             <a:endParaRPr lang="en-US" sz="800" dirty="0"/>
           </a:p>
@@ -17530,7 +17530,7 @@
                 <a:ea typeface="Arial" pitchFamily="34" charset="-122"/>
                 <a:cs typeface="Arial" pitchFamily="34" charset="-120"/>
               </a:rPr>
-              <a:t>ホテルコメント横浜関内（8.88点, ¥4,463,320）</a:t>
+              <a:t>ダイワロイネットホテル東京大崎（8.84点, ¥5,203,037）</a:t>
             </a:r>
             <a:endParaRPr lang="en-US" sz="800" dirty="0"/>
           </a:p>
@@ -17547,7 +17547,7 @@
                 <a:ea typeface="Arial" pitchFamily="34" charset="-122"/>
                 <a:cs typeface="Arial" pitchFamily="34" charset="-120"/>
               </a:rPr>
-              <a:t>ダイワロイネットホテル東京大崎（8.87点, ¥5,203,037）</a:t>
+              <a:t>ホテルコメント横浜関内（8.82点, ¥4,463,320）</a:t>
             </a:r>
             <a:endParaRPr lang="en-US" sz="800" dirty="0"/>
           </a:p>
@@ -17564,7 +17564,7 @@
                 <a:ea typeface="Arial" pitchFamily="34" charset="-122"/>
                 <a:cs typeface="Arial" pitchFamily="34" charset="-120"/>
               </a:rPr>
-              <a:t>川崎日航ホテル（8.68点, ¥7,168,120）</a:t>
+              <a:t>川崎日航ホテル（8.64点, ¥7,168,120）</a:t>
             </a:r>
             <a:endParaRPr lang="en-US" sz="800" dirty="0"/>
           </a:p>
@@ -17581,7 +17581,7 @@
                 <a:ea typeface="Arial" pitchFamily="34" charset="-122"/>
                 <a:cs typeface="Arial" pitchFamily="34" charset="-120"/>
               </a:rPr>
-              <a:t>ハートンホテル東品川（8.59点, ¥11,211,550）</a:t>
+              <a:t>ハートンホテル東品川（8.48点, ¥11,211,550）</a:t>
             </a:r>
             <a:endParaRPr lang="en-US" sz="800" dirty="0"/>
           </a:p>
@@ -17598,7 +17598,7 @@
                 <a:ea typeface="Arial" pitchFamily="34" charset="-122"/>
                 <a:cs typeface="Arial" pitchFamily="34" charset="-120"/>
               </a:rPr>
-              <a:t>変なホテル東京羽田（8.3点, ¥5,358,150）</a:t>
+              <a:t>変なホテル東京羽田（8.31点, ¥5,358,150）</a:t>
             </a:r>
             <a:endParaRPr lang="en-US" sz="800" dirty="0"/>
           </a:p>
@@ -17762,7 +17762,7 @@
                 <a:ea typeface="Arial" pitchFamily="34" charset="-122"/>
                 <a:cs typeface="Arial" pitchFamily="34" charset="-120"/>
               </a:rPr>
-              <a:t>第一イン池袋（9.18点, ¥4,310,610）</a:t>
+              <a:t>第一イン池袋（9.48点, ¥4,310,610）</a:t>
             </a:r>
             <a:endParaRPr lang="en-US" sz="800" dirty="0"/>
           </a:p>
@@ -17796,7 +17796,7 @@
                 <a:ea typeface="Arial" pitchFamily="34" charset="-122"/>
                 <a:cs typeface="Arial" pitchFamily="34" charset="-120"/>
               </a:rPr>
-              <a:t>ホテルケヤキゲート東京府中（8.74点, ¥4,425,395）</a:t>
+              <a:t>ホテルケヤキゲート東京府中（8.81点, ¥4,425,395）</a:t>
             </a:r>
             <a:endParaRPr lang="en-US" sz="800" dirty="0"/>
           </a:p>
@@ -17813,7 +17813,7 @@
                 <a:ea typeface="Arial" pitchFamily="34" charset="-122"/>
                 <a:cs typeface="Arial" pitchFamily="34" charset="-120"/>
               </a:rPr>
-              <a:t>リッチモンドホテル東京目白（8.73点, ¥3,663,440）</a:t>
+              <a:t>リッチモンドホテル東京目白（8.6点, ¥3,663,440）</a:t>
             </a:r>
             <a:endParaRPr lang="en-US" sz="800" dirty="0"/>
           </a:p>
@@ -17830,7 +17830,7 @@
                 <a:ea typeface="Arial" pitchFamily="34" charset="-122"/>
                 <a:cs typeface="Arial" pitchFamily="34" charset="-120"/>
               </a:rPr>
-              <a:t>コンフォートホテル成田（8.5点, ¥2,655,760）</a:t>
+              <a:t>コンフォートホテル成田（8.46点, ¥2,655,760）</a:t>
             </a:r>
             <a:endParaRPr lang="en-US" sz="800" dirty="0"/>
           </a:p>
@@ -17847,7 +17847,7 @@
                 <a:ea typeface="Arial" pitchFamily="34" charset="-122"/>
                 <a:cs typeface="Arial" pitchFamily="34" charset="-120"/>
               </a:rPr>
-              <a:t>コンフォートイン六本木（8.19点, ¥2,842,630）</a:t>
+              <a:t>アパホテル相模原橋本駅東（8.22点, ¥2,698,420）</a:t>
             </a:r>
             <a:endParaRPr lang="en-US" sz="800" dirty="0"/>
           </a:p>
@@ -17864,7 +17864,7 @@
                 <a:ea typeface="Arial" pitchFamily="34" charset="-122"/>
                 <a:cs typeface="Arial" pitchFamily="34" charset="-120"/>
               </a:rPr>
-              <a:t>アパホテル相模原橋本駅東（8.17点, ¥2,698,420）</a:t>
+              <a:t>コンフォートイン六本木（8.15点, ¥2,842,630）</a:t>
             </a:r>
             <a:endParaRPr lang="en-US" sz="800" dirty="0"/>
           </a:p>
@@ -18028,7 +18028,7 @@
                 <a:ea typeface="Arial" pitchFamily="34" charset="-122"/>
                 <a:cs typeface="Arial" pitchFamily="34" charset="-120"/>
               </a:rPr>
-              <a:t>コンフォートホテル博多（7.88点, ¥5,764,630）</a:t>
+              <a:t>コンフォートホテル博多（7.73点, ¥5,764,630）</a:t>
             </a:r>
             <a:endParaRPr lang="en-US" sz="800" dirty="0"/>
           </a:p>
@@ -18045,7 +18045,7 @@
                 <a:ea typeface="Arial" pitchFamily="34" charset="-122"/>
                 <a:cs typeface="Arial" pitchFamily="34" charset="-120"/>
               </a:rPr>
-              <a:t>アパホテル蒲田駅東（7.34点, ¥4,679,520）</a:t>
+              <a:t>アパホテル蒲田駅東（7.38点, ¥4,679,520）</a:t>
             </a:r>
             <a:endParaRPr lang="en-US" sz="800" dirty="0"/>
           </a:p>
@@ -18062,7 +18062,7 @@
                 <a:ea typeface="Arial" pitchFamily="34" charset="-122"/>
                 <a:cs typeface="Arial" pitchFamily="34" charset="-120"/>
               </a:rPr>
-              <a:t>チサンホテル浜松町（7.02点, ¥5,578,650）</a:t>
+              <a:t>チサンホテル浜松町（6.57点, ¥5,578,650）</a:t>
             </a:r>
             <a:endParaRPr lang="en-US" sz="800" dirty="0"/>
           </a:p>
@@ -18226,7 +18226,7 @@
                 <a:ea typeface="Arial" pitchFamily="34" charset="-122"/>
                 <a:cs typeface="Arial" pitchFamily="34" charset="-120"/>
               </a:rPr>
-              <a:t>コンフォートホテル横浜関内（7.52点, ¥4,051,890）</a:t>
+              <a:t>コンフォートホテル横浜関内（7.57点, ¥4,051,890）</a:t>
             </a:r>
             <a:endParaRPr lang="en-US" sz="800" dirty="0"/>
           </a:p>
@@ -23510,9 +23510,9 @@
                   <a:srgbClr val="333333"/>
                 </a:solidFill>
               </a:rPr>
-              <a:t>  コンフォートスイーツ東京ベイ（9.22点）
-  第一イン池袋（9.18点）
-  京成リッチモンドホテル東京錦糸町（9.12点）
+              <a:t>  第一イン池袋（9.48点）
+  京成リッチモンドホテル東京錦糸町（9.24点）
+  コンフォートスイーツ東京ベイ（9.14点）
 </a:t>
             </a:r>
             <a:pPr indent="0" marL="0">
@@ -23536,9 +23536,9 @@
                   <a:srgbClr val="333333"/>
                 </a:solidFill>
               </a:rPr>
-              <a:t>  アパホテル蒲田駅東（7.34点）
+              <a:t>  アパホテル蒲田駅東（7.38点）
   コートホテル新横浜（7.12点）
-  チサンホテル浜松町（7.02点）
+  チサンホテル浜松町（6.57点）
 </a:t>
             </a:r>
             <a:pPr indent="0" marL="0">

--- a/納品レポート/PRIMECHANGE戦略レポート/PRIMECHANGE_CS向上戦略提案書.pptx
+++ b/納品レポート/PRIMECHANGE戦略レポート/PRIMECHANGE_CS向上戦略提案書.pptx
@@ -2274,7 +2274,7 @@
                 <a:ea typeface="Arial" pitchFamily="34" charset="-122"/>
                 <a:cs typeface="Arial" pitchFamily="34" charset="-120"/>
               </a:rPr>
-              <a:t>対象：19ホテル | 月間総売上：¥99,847,777 | 口コミ：2290件</a:t>
+              <a:t>対象：19ホテル | 月間総売上：¥99,847,777 | 口コミ：1950件</a:t>
             </a:r>
             <a:endParaRPr lang="en-US" sz="1100" dirty="0"/>
           </a:p>
@@ -15175,7 +15175,7 @@
                 <a:ea typeface="Arial" pitchFamily="34" charset="-122"/>
                 <a:cs typeface="Arial" pitchFamily="34" charset="-120"/>
               </a:rPr>
-              <a:t>4.6%</a:t>
+              <a:t>4.3%</a:t>
             </a:r>
             <a:endParaRPr lang="en-US" sz="2800" dirty="0"/>
           </a:p>
@@ -17496,7 +17496,7 @@
                 <a:ea typeface="Arial" pitchFamily="34" charset="-122"/>
                 <a:cs typeface="Arial" pitchFamily="34" charset="-120"/>
               </a:rPr>
-              <a:t>京成リッチモンドホテル東京錦糸町（9.24点, ¥4,791,800）</a:t>
+              <a:t>京成リッチモンドホテル東京錦糸町（9.3点, ¥4,791,800）</a:t>
             </a:r>
             <a:endParaRPr lang="en-US" sz="800" dirty="0"/>
           </a:p>
@@ -17513,7 +17513,7 @@
                 <a:ea typeface="Arial" pitchFamily="34" charset="-122"/>
                 <a:cs typeface="Arial" pitchFamily="34" charset="-120"/>
               </a:rPr>
-              <a:t>コンフォートスイーツ東京ベイ（9.14点, ¥13,228,360）</a:t>
+              <a:t>コンフォートスイーツ東京ベイ（9.06点, ¥13,228,360）</a:t>
             </a:r>
             <a:endParaRPr lang="en-US" sz="800" dirty="0"/>
           </a:p>
@@ -17530,7 +17530,7 @@
                 <a:ea typeface="Arial" pitchFamily="34" charset="-122"/>
                 <a:cs typeface="Arial" pitchFamily="34" charset="-120"/>
               </a:rPr>
-              <a:t>ダイワロイネットホテル東京大崎（8.84点, ¥5,203,037）</a:t>
+              <a:t>ホテルコメント横浜関内（8.83点, ¥4,463,320）</a:t>
             </a:r>
             <a:endParaRPr lang="en-US" sz="800" dirty="0"/>
           </a:p>
@@ -17547,7 +17547,7 @@
                 <a:ea typeface="Arial" pitchFamily="34" charset="-122"/>
                 <a:cs typeface="Arial" pitchFamily="34" charset="-120"/>
               </a:rPr>
-              <a:t>ホテルコメント横浜関内（8.82点, ¥4,463,320）</a:t>
+              <a:t>川崎日航ホテル（8.64点, ¥7,168,120）</a:t>
             </a:r>
             <a:endParaRPr lang="en-US" sz="800" dirty="0"/>
           </a:p>
@@ -17564,7 +17564,7 @@
                 <a:ea typeface="Arial" pitchFamily="34" charset="-122"/>
                 <a:cs typeface="Arial" pitchFamily="34" charset="-120"/>
               </a:rPr>
-              <a:t>川崎日航ホテル（8.64点, ¥7,168,120）</a:t>
+              <a:t>ダイワロイネットホテル東京大崎（8.62点, ¥5,203,037）</a:t>
             </a:r>
             <a:endParaRPr lang="en-US" sz="800" dirty="0"/>
           </a:p>
@@ -17581,7 +17581,7 @@
                 <a:ea typeface="Arial" pitchFamily="34" charset="-122"/>
                 <a:cs typeface="Arial" pitchFamily="34" charset="-120"/>
               </a:rPr>
-              <a:t>ハートンホテル東品川（8.48点, ¥11,211,550）</a:t>
+              <a:t>ハートンホテル東品川（8.45点, ¥11,211,550）</a:t>
             </a:r>
             <a:endParaRPr lang="en-US" sz="800" dirty="0"/>
           </a:p>
@@ -17762,7 +17762,7 @@
                 <a:ea typeface="Arial" pitchFamily="34" charset="-122"/>
                 <a:cs typeface="Arial" pitchFamily="34" charset="-120"/>
               </a:rPr>
-              <a:t>第一イン池袋（9.48点, ¥4,310,610）</a:t>
+              <a:t>第一イン池袋（9.49点, ¥4,310,610）</a:t>
             </a:r>
             <a:endParaRPr lang="en-US" sz="800" dirty="0"/>
           </a:p>
@@ -17779,7 +17779,7 @@
                 <a:ea typeface="Arial" pitchFamily="34" charset="-122"/>
                 <a:cs typeface="Arial" pitchFamily="34" charset="-120"/>
               </a:rPr>
-              <a:t>コンフォートホテルERA東京東神田（8.9点, ¥4,047,280）</a:t>
+              <a:t>ホテルケヤキゲート東京府中（8.95点, ¥4,425,395）</a:t>
             </a:r>
             <a:endParaRPr lang="en-US" sz="800" dirty="0"/>
           </a:p>
@@ -17796,7 +17796,7 @@
                 <a:ea typeface="Arial" pitchFamily="34" charset="-122"/>
                 <a:cs typeface="Arial" pitchFamily="34" charset="-120"/>
               </a:rPr>
-              <a:t>ホテルケヤキゲート東京府中（8.81点, ¥4,425,395）</a:t>
+              <a:t>コンフォートホテルERA東京東神田（8.93点, ¥4,047,280）</a:t>
             </a:r>
             <a:endParaRPr lang="en-US" sz="800" dirty="0"/>
           </a:p>
@@ -17813,7 +17813,7 @@
                 <a:ea typeface="Arial" pitchFamily="34" charset="-122"/>
                 <a:cs typeface="Arial" pitchFamily="34" charset="-120"/>
               </a:rPr>
-              <a:t>リッチモンドホテル東京目白（8.6点, ¥3,663,440）</a:t>
+              <a:t>コンフォートホテル成田（8.67点, ¥2,655,760）</a:t>
             </a:r>
             <a:endParaRPr lang="en-US" sz="800" dirty="0"/>
           </a:p>
@@ -17830,7 +17830,7 @@
                 <a:ea typeface="Arial" pitchFamily="34" charset="-122"/>
                 <a:cs typeface="Arial" pitchFamily="34" charset="-120"/>
               </a:rPr>
-              <a:t>コンフォートホテル成田（8.46点, ¥2,655,760）</a:t>
+              <a:t>リッチモンドホテル東京目白（8.6点, ¥3,663,440）</a:t>
             </a:r>
             <a:endParaRPr lang="en-US" sz="800" dirty="0"/>
           </a:p>
@@ -17847,7 +17847,7 @@
                 <a:ea typeface="Arial" pitchFamily="34" charset="-122"/>
                 <a:cs typeface="Arial" pitchFamily="34" charset="-120"/>
               </a:rPr>
-              <a:t>アパホテル相模原橋本駅東（8.22点, ¥2,698,420）</a:t>
+              <a:t>コンフォートイン六本木（8.25点, ¥2,842,630）</a:t>
             </a:r>
             <a:endParaRPr lang="en-US" sz="800" dirty="0"/>
           </a:p>
@@ -17864,7 +17864,7 @@
                 <a:ea typeface="Arial" pitchFamily="34" charset="-122"/>
                 <a:cs typeface="Arial" pitchFamily="34" charset="-120"/>
               </a:rPr>
-              <a:t>コンフォートイン六本木（8.15点, ¥2,842,630）</a:t>
+              <a:t>アパホテル相模原橋本駅東（8.22点, ¥2,698,420）</a:t>
             </a:r>
             <a:endParaRPr lang="en-US" sz="800" dirty="0"/>
           </a:p>
@@ -18028,7 +18028,7 @@
                 <a:ea typeface="Arial" pitchFamily="34" charset="-122"/>
                 <a:cs typeface="Arial" pitchFamily="34" charset="-120"/>
               </a:rPr>
-              <a:t>コンフォートホテル博多（7.73点, ¥5,764,630）</a:t>
+              <a:t>コンフォートホテル博多（7.89点, ¥5,764,630）</a:t>
             </a:r>
             <a:endParaRPr lang="en-US" sz="800" dirty="0"/>
           </a:p>
@@ -18062,7 +18062,7 @@
                 <a:ea typeface="Arial" pitchFamily="34" charset="-122"/>
                 <a:cs typeface="Arial" pitchFamily="34" charset="-120"/>
               </a:rPr>
-              <a:t>チサンホテル浜松町（6.57点, ¥5,578,650）</a:t>
+              <a:t>チサンホテル浜松町（6.52点, ¥5,578,650）</a:t>
             </a:r>
             <a:endParaRPr lang="en-US" sz="800" dirty="0"/>
           </a:p>
@@ -23510,9 +23510,9 @@
                   <a:srgbClr val="333333"/>
                 </a:solidFill>
               </a:rPr>
-              <a:t>  第一イン池袋（9.48点）
-  京成リッチモンドホテル東京錦糸町（9.24点）
-  コンフォートスイーツ東京ベイ（9.14点）
+              <a:t>  第一イン池袋（9.49点）
+  京成リッチモンドホテル東京錦糸町（9.3点）
+  コンフォートスイーツ東京ベイ（9.06点）
 </a:t>
             </a:r>
             <a:pPr indent="0" marL="0">
@@ -23538,7 +23538,7 @@
               </a:rPr>
               <a:t>  アパホテル蒲田駅東（7.38点）
   コートホテル新横浜（7.12点）
-  チサンホテル浜松町（6.57点）
+  チサンホテル浜松町（6.52点）
 </a:t>
             </a:r>
             <a:pPr indent="0" marL="0">

--- a/納品レポート/PRIMECHANGE戦略レポート/PRIMECHANGE_CS向上戦略提案書.pptx
+++ b/納品レポート/PRIMECHANGE戦略レポート/PRIMECHANGE_CS向上戦略提案書.pptx
@@ -2274,7 +2274,7 @@
                 <a:ea typeface="Arial" pitchFamily="34" charset="-122"/>
                 <a:cs typeface="Arial" pitchFamily="34" charset="-120"/>
               </a:rPr>
-              <a:t>対象：19ホテル | 月間総売上：¥99,847,777 | 口コミ：1950件</a:t>
+              <a:t>対象：19ホテル | 月間総売上：¥99,847,777 | 口コミ：1311件</a:t>
             </a:r>
             <a:endParaRPr lang="en-US" sz="1100" dirty="0"/>
           </a:p>
@@ -14925,7 +14925,7 @@
                 <a:ea typeface="Arial" pitchFamily="34" charset="-122"/>
                 <a:cs typeface="Arial" pitchFamily="34" charset="-120"/>
               </a:rPr>
-              <a:t>8.35</a:t>
+              <a:t>8.44</a:t>
             </a:r>
             <a:endParaRPr lang="en-US" sz="2800" dirty="0"/>
           </a:p>
@@ -15175,7 +15175,7 @@
                 <a:ea typeface="Arial" pitchFamily="34" charset="-122"/>
                 <a:cs typeface="Arial" pitchFamily="34" charset="-120"/>
               </a:rPr>
-              <a:t>4.3%</a:t>
+              <a:t>4%</a:t>
             </a:r>
             <a:endParaRPr lang="en-US" sz="2800" dirty="0"/>
           </a:p>
@@ -16916,7 +16916,7 @@
                   <a:srgbClr val="333333"/>
                 </a:solidFill>
               </a:rPr>
-              <a:t>8.35点</a:t>
+              <a:t>8.44点</a:t>
             </a:r>
             <a:pPr indent="0" marL="0">
               <a:buNone/>
@@ -17547,7 +17547,7 @@
                 <a:ea typeface="Arial" pitchFamily="34" charset="-122"/>
                 <a:cs typeface="Arial" pitchFamily="34" charset="-120"/>
               </a:rPr>
-              <a:t>川崎日航ホテル（8.64点, ¥7,168,120）</a:t>
+              <a:t>川崎日航ホテル（8.66点, ¥7,168,120）</a:t>
             </a:r>
             <a:endParaRPr lang="en-US" sz="800" dirty="0"/>
           </a:p>
@@ -17598,7 +17598,7 @@
                 <a:ea typeface="Arial" pitchFamily="34" charset="-122"/>
                 <a:cs typeface="Arial" pitchFamily="34" charset="-120"/>
               </a:rPr>
-              <a:t>変なホテル東京羽田（8.31点, ¥5,358,150）</a:t>
+              <a:t>変なホテル東京羽田（8.35点, ¥5,358,150）</a:t>
             </a:r>
             <a:endParaRPr lang="en-US" sz="800" dirty="0"/>
           </a:p>
@@ -17796,7 +17796,7 @@
                 <a:ea typeface="Arial" pitchFamily="34" charset="-122"/>
                 <a:cs typeface="Arial" pitchFamily="34" charset="-120"/>
               </a:rPr>
-              <a:t>コンフォートホテルERA東京東神田（8.93点, ¥4,047,280）</a:t>
+              <a:t>コンフォートホテルERA東京東神田（8.78点, ¥4,047,280）</a:t>
             </a:r>
             <a:endParaRPr lang="en-US" sz="800" dirty="0"/>
           </a:p>
@@ -17830,7 +17830,7 @@
                 <a:ea typeface="Arial" pitchFamily="34" charset="-122"/>
                 <a:cs typeface="Arial" pitchFamily="34" charset="-120"/>
               </a:rPr>
-              <a:t>リッチモンドホテル東京目白（8.6点, ¥3,663,440）</a:t>
+              <a:t>リッチモンドホテル東京目白（8.49点, ¥3,663,440）</a:t>
             </a:r>
             <a:endParaRPr lang="en-US" sz="800" dirty="0"/>
           </a:p>
@@ -17864,7 +17864,7 @@
                 <a:ea typeface="Arial" pitchFamily="34" charset="-122"/>
                 <a:cs typeface="Arial" pitchFamily="34" charset="-120"/>
               </a:rPr>
-              <a:t>アパホテル相模原橋本駅東（8.22点, ¥2,698,420）</a:t>
+              <a:t>アパホテル相模原橋本駅東（8点, ¥2,698,420）</a:t>
             </a:r>
             <a:endParaRPr lang="en-US" sz="800" dirty="0"/>
           </a:p>
@@ -18045,7 +18045,7 @@
                 <a:ea typeface="Arial" pitchFamily="34" charset="-122"/>
                 <a:cs typeface="Arial" pitchFamily="34" charset="-120"/>
               </a:rPr>
-              <a:t>アパホテル蒲田駅東（7.38点, ¥4,679,520）</a:t>
+              <a:t>アパホテル蒲田駅東（7.5点, ¥4,679,520）</a:t>
             </a:r>
             <a:endParaRPr lang="en-US" sz="800" dirty="0"/>
           </a:p>
@@ -18226,7 +18226,7 @@
                 <a:ea typeface="Arial" pitchFamily="34" charset="-122"/>
                 <a:cs typeface="Arial" pitchFamily="34" charset="-120"/>
               </a:rPr>
-              <a:t>コンフォートホテル横浜関内（7.57点, ¥4,051,890）</a:t>
+              <a:t>コンフォートホテル横浜関内（7.18点, ¥4,051,890）</a:t>
             </a:r>
             <a:endParaRPr lang="en-US" sz="800" dirty="0"/>
           </a:p>
@@ -18243,7 +18243,7 @@
                 <a:ea typeface="Arial" pitchFamily="34" charset="-122"/>
                 <a:cs typeface="Arial" pitchFamily="34" charset="-120"/>
               </a:rPr>
-              <a:t>コートホテル新横浜（7.12点, ¥3,705,215）</a:t>
+              <a:t>コートホテル新横浜（0点, ¥3,705,215）</a:t>
             </a:r>
             <a:endParaRPr lang="en-US" sz="800" dirty="0"/>
           </a:p>
@@ -23536,9 +23536,9 @@
                   <a:srgbClr val="333333"/>
                 </a:solidFill>
               </a:rPr>
-              <a:t>  アパホテル蒲田駅東（7.38点）
-  コートホテル新横浜（7.12点）
+              <a:t>  コンフォートホテル横浜関内（7.18点）
   チサンホテル浜松町（6.52点）
+  コートホテル新横浜（0点）
 </a:t>
             </a:r>
             <a:pPr indent="0" marL="0">

--- a/納品レポート/PRIMECHANGE戦略レポート/PRIMECHANGE_CS向上戦略提案書.pptx
+++ b/納品レポート/PRIMECHANGE戦略レポート/PRIMECHANGE_CS向上戦略提案書.pptx
@@ -2274,7 +2274,7 @@
                 <a:ea typeface="Arial" pitchFamily="34" charset="-122"/>
                 <a:cs typeface="Arial" pitchFamily="34" charset="-120"/>
               </a:rPr>
-              <a:t>対象：19ホテル | 月間総売上：¥99,847,777 | 口コミ：1311件</a:t>
+              <a:t>対象：19ホテル | 月間総売上：¥99,847,777 | 口コミ：1762件</a:t>
             </a:r>
             <a:endParaRPr lang="en-US" sz="1100" dirty="0"/>
           </a:p>
@@ -14925,7 +14925,7 @@
                 <a:ea typeface="Arial" pitchFamily="34" charset="-122"/>
                 <a:cs typeface="Arial" pitchFamily="34" charset="-120"/>
               </a:rPr>
-              <a:t>8.44</a:t>
+              <a:t>8.36</a:t>
             </a:r>
             <a:endParaRPr lang="en-US" sz="2800" dirty="0"/>
           </a:p>
@@ -15175,7 +15175,7 @@
                 <a:ea typeface="Arial" pitchFamily="34" charset="-122"/>
                 <a:cs typeface="Arial" pitchFamily="34" charset="-120"/>
               </a:rPr>
-              <a:t>4%</a:t>
+              <a:t>4.4%</a:t>
             </a:r>
             <a:endParaRPr lang="en-US" sz="2800" dirty="0"/>
           </a:p>
@@ -16916,7 +16916,7 @@
                   <a:srgbClr val="333333"/>
                 </a:solidFill>
               </a:rPr>
-              <a:t>8.44点</a:t>
+              <a:t>8.36点</a:t>
             </a:r>
             <a:pPr indent="0" marL="0">
               <a:buNone/>
@@ -17496,7 +17496,7 @@
                 <a:ea typeface="Arial" pitchFamily="34" charset="-122"/>
                 <a:cs typeface="Arial" pitchFamily="34" charset="-120"/>
               </a:rPr>
-              <a:t>京成リッチモンドホテル東京錦糸町（9.3点, ¥4,791,800）</a:t>
+              <a:t>京成リッチモンドホテル東京錦糸町（9.32点, ¥4,791,800）</a:t>
             </a:r>
             <a:endParaRPr lang="en-US" sz="800" dirty="0"/>
           </a:p>
@@ -17513,7 +17513,7 @@
                 <a:ea typeface="Arial" pitchFamily="34" charset="-122"/>
                 <a:cs typeface="Arial" pitchFamily="34" charset="-120"/>
               </a:rPr>
-              <a:t>コンフォートスイーツ東京ベイ（9.06点, ¥13,228,360）</a:t>
+              <a:t>コンフォートスイーツ東京ベイ（9.07点, ¥13,228,360）</a:t>
             </a:r>
             <a:endParaRPr lang="en-US" sz="800" dirty="0"/>
           </a:p>
@@ -17530,7 +17530,7 @@
                 <a:ea typeface="Arial" pitchFamily="34" charset="-122"/>
                 <a:cs typeface="Arial" pitchFamily="34" charset="-120"/>
               </a:rPr>
-              <a:t>ホテルコメント横浜関内（8.83点, ¥4,463,320）</a:t>
+              <a:t>ホテルコメント横浜関内（8.81点, ¥4,463,320）</a:t>
             </a:r>
             <a:endParaRPr lang="en-US" sz="800" dirty="0"/>
           </a:p>
@@ -17547,7 +17547,7 @@
                 <a:ea typeface="Arial" pitchFamily="34" charset="-122"/>
                 <a:cs typeface="Arial" pitchFamily="34" charset="-120"/>
               </a:rPr>
-              <a:t>川崎日航ホテル（8.66点, ¥7,168,120）</a:t>
+              <a:t>川崎日航ホテル（8.64点, ¥7,168,120）</a:t>
             </a:r>
             <a:endParaRPr lang="en-US" sz="800" dirty="0"/>
           </a:p>
@@ -17598,7 +17598,7 @@
                 <a:ea typeface="Arial" pitchFamily="34" charset="-122"/>
                 <a:cs typeface="Arial" pitchFamily="34" charset="-120"/>
               </a:rPr>
-              <a:t>変なホテル東京羽田（8.35点, ¥5,358,150）</a:t>
+              <a:t>変なホテル東京羽田（8.31点, ¥5,358,150）</a:t>
             </a:r>
             <a:endParaRPr lang="en-US" sz="800" dirty="0"/>
           </a:p>
@@ -17762,7 +17762,7 @@
                 <a:ea typeface="Arial" pitchFamily="34" charset="-122"/>
                 <a:cs typeface="Arial" pitchFamily="34" charset="-120"/>
               </a:rPr>
-              <a:t>第一イン池袋（9.49点, ¥4,310,610）</a:t>
+              <a:t>第一イン池袋（9.5点, ¥4,310,610）</a:t>
             </a:r>
             <a:endParaRPr lang="en-US" sz="800" dirty="0"/>
           </a:p>
@@ -17779,7 +17779,7 @@
                 <a:ea typeface="Arial" pitchFamily="34" charset="-122"/>
                 <a:cs typeface="Arial" pitchFamily="34" charset="-120"/>
               </a:rPr>
-              <a:t>ホテルケヤキゲート東京府中（8.95点, ¥4,425,395）</a:t>
+              <a:t>ホテルケヤキゲート東京府中（8.98点, ¥4,425,395）</a:t>
             </a:r>
             <a:endParaRPr lang="en-US" sz="800" dirty="0"/>
           </a:p>
@@ -17796,7 +17796,7 @@
                 <a:ea typeface="Arial" pitchFamily="34" charset="-122"/>
                 <a:cs typeface="Arial" pitchFamily="34" charset="-120"/>
               </a:rPr>
-              <a:t>コンフォートホテルERA東京東神田（8.78点, ¥4,047,280）</a:t>
+              <a:t>コンフォートホテルERA東京東神田（8.93点, ¥4,047,280）</a:t>
             </a:r>
             <a:endParaRPr lang="en-US" sz="800" dirty="0"/>
           </a:p>
@@ -17830,7 +17830,7 @@
                 <a:ea typeface="Arial" pitchFamily="34" charset="-122"/>
                 <a:cs typeface="Arial" pitchFamily="34" charset="-120"/>
               </a:rPr>
-              <a:t>リッチモンドホテル東京目白（8.49点, ¥3,663,440）</a:t>
+              <a:t>リッチモンドホテル東京目白（8.6点, ¥3,663,440）</a:t>
             </a:r>
             <a:endParaRPr lang="en-US" sz="800" dirty="0"/>
           </a:p>
@@ -17864,7 +17864,7 @@
                 <a:ea typeface="Arial" pitchFamily="34" charset="-122"/>
                 <a:cs typeface="Arial" pitchFamily="34" charset="-120"/>
               </a:rPr>
-              <a:t>アパホテル相模原橋本駅東（8点, ¥2,698,420）</a:t>
+              <a:t>アパホテル相模原橋本駅東（8.06点, ¥2,698,420）</a:t>
             </a:r>
             <a:endParaRPr lang="en-US" sz="800" dirty="0"/>
           </a:p>
@@ -18045,7 +18045,7 @@
                 <a:ea typeface="Arial" pitchFamily="34" charset="-122"/>
                 <a:cs typeface="Arial" pitchFamily="34" charset="-120"/>
               </a:rPr>
-              <a:t>アパホテル蒲田駅東（7.5点, ¥4,679,520）</a:t>
+              <a:t>アパホテル蒲田駅東（7.38点, ¥4,679,520）</a:t>
             </a:r>
             <a:endParaRPr lang="en-US" sz="800" dirty="0"/>
           </a:p>
@@ -18226,7 +18226,7 @@
                 <a:ea typeface="Arial" pitchFamily="34" charset="-122"/>
                 <a:cs typeface="Arial" pitchFamily="34" charset="-120"/>
               </a:rPr>
-              <a:t>コンフォートホテル横浜関内（7.18点, ¥4,051,890）</a:t>
+              <a:t>コンフォートホテル横浜関内（7.57点, ¥4,051,890）</a:t>
             </a:r>
             <a:endParaRPr lang="en-US" sz="800" dirty="0"/>
           </a:p>
@@ -18243,7 +18243,7 @@
                 <a:ea typeface="Arial" pitchFamily="34" charset="-122"/>
                 <a:cs typeface="Arial" pitchFamily="34" charset="-120"/>
               </a:rPr>
-              <a:t>コートホテル新横浜（0点, ¥3,705,215）</a:t>
+              <a:t>コートホテル新横浜（7.12点, ¥3,705,215）</a:t>
             </a:r>
             <a:endParaRPr lang="en-US" sz="800" dirty="0"/>
           </a:p>
@@ -23510,9 +23510,9 @@
                   <a:srgbClr val="333333"/>
                 </a:solidFill>
               </a:rPr>
-              <a:t>  第一イン池袋（9.49点）
-  京成リッチモンドホテル東京錦糸町（9.3点）
-  コンフォートスイーツ東京ベイ（9.06点）
+              <a:t>  第一イン池袋（9.5点）
+  京成リッチモンドホテル東京錦糸町（9.32点）
+  コンフォートスイーツ東京ベイ（9.07点）
 </a:t>
             </a:r>
             <a:pPr indent="0" marL="0">
@@ -23536,9 +23536,9 @@
                   <a:srgbClr val="333333"/>
                 </a:solidFill>
               </a:rPr>
-              <a:t>  コンフォートホテル横浜関内（7.18点）
+              <a:t>  アパホテル蒲田駅東（7.38点）
+  コートホテル新横浜（7.12点）
   チサンホテル浜松町（6.52点）
-  コートホテル新横浜（0点）
 </a:t>
             </a:r>
             <a:pPr indent="0" marL="0">

--- a/納品レポート/PRIMECHANGE戦略レポート/PRIMECHANGE_CS向上戦略提案書.pptx
+++ b/納品レポート/PRIMECHANGE戦略レポート/PRIMECHANGE_CS向上戦略提案書.pptx
@@ -2274,7 +2274,7 @@
                 <a:ea typeface="Arial" pitchFamily="34" charset="-122"/>
                 <a:cs typeface="Arial" pitchFamily="34" charset="-120"/>
               </a:rPr>
-              <a:t>対象：19ホテル | 月間総売上：¥99,847,777 | 口コミ：1762件</a:t>
+              <a:t>対象：19ホテル | 月間総売上：¥99,847,777 | 口コミ：1787件</a:t>
             </a:r>
             <a:endParaRPr lang="en-US" sz="1100" dirty="0"/>
           </a:p>
@@ -15175,7 +15175,7 @@
                 <a:ea typeface="Arial" pitchFamily="34" charset="-122"/>
                 <a:cs typeface="Arial" pitchFamily="34" charset="-120"/>
               </a:rPr>
-              <a:t>4.4%</a:t>
+              <a:t>4.5%</a:t>
             </a:r>
             <a:endParaRPr lang="en-US" sz="2800" dirty="0"/>
           </a:p>
@@ -17530,7 +17530,7 @@
                 <a:ea typeface="Arial" pitchFamily="34" charset="-122"/>
                 <a:cs typeface="Arial" pitchFamily="34" charset="-120"/>
               </a:rPr>
-              <a:t>ホテルコメント横浜関内（8.81点, ¥4,463,320）</a:t>
+              <a:t>ホテルコメント横浜関内（8.83点, ¥4,463,320）</a:t>
             </a:r>
             <a:endParaRPr lang="en-US" sz="800" dirty="0"/>
           </a:p>
@@ -17564,7 +17564,7 @@
                 <a:ea typeface="Arial" pitchFamily="34" charset="-122"/>
                 <a:cs typeface="Arial" pitchFamily="34" charset="-120"/>
               </a:rPr>
-              <a:t>ダイワロイネットホテル東京大崎（8.62点, ¥5,203,037）</a:t>
+              <a:t>ダイワロイネットホテル東京大崎（8.63点, ¥5,203,037）</a:t>
             </a:r>
             <a:endParaRPr lang="en-US" sz="800" dirty="0"/>
           </a:p>
@@ -17581,7 +17581,7 @@
                 <a:ea typeface="Arial" pitchFamily="34" charset="-122"/>
                 <a:cs typeface="Arial" pitchFamily="34" charset="-120"/>
               </a:rPr>
-              <a:t>ハートンホテル東品川（8.45点, ¥11,211,550）</a:t>
+              <a:t>ハートンホテル東品川（8.41点, ¥11,211,550）</a:t>
             </a:r>
             <a:endParaRPr lang="en-US" sz="800" dirty="0"/>
           </a:p>
@@ -17762,7 +17762,7 @@
                 <a:ea typeface="Arial" pitchFamily="34" charset="-122"/>
                 <a:cs typeface="Arial" pitchFamily="34" charset="-120"/>
               </a:rPr>
-              <a:t>第一イン池袋（9.5点, ¥4,310,610）</a:t>
+              <a:t>第一イン池袋（9.44点, ¥4,310,610）</a:t>
             </a:r>
             <a:endParaRPr lang="en-US" sz="800" dirty="0"/>
           </a:p>
@@ -17813,7 +17813,7 @@
                 <a:ea typeface="Arial" pitchFamily="34" charset="-122"/>
                 <a:cs typeface="Arial" pitchFamily="34" charset="-120"/>
               </a:rPr>
-              <a:t>コンフォートホテル成田（8.67点, ¥2,655,760）</a:t>
+              <a:t>コンフォートホテル成田（8.66点, ¥2,655,760）</a:t>
             </a:r>
             <a:endParaRPr lang="en-US" sz="800" dirty="0"/>
           </a:p>
@@ -18028,7 +18028,7 @@
                 <a:ea typeface="Arial" pitchFamily="34" charset="-122"/>
                 <a:cs typeface="Arial" pitchFamily="34" charset="-120"/>
               </a:rPr>
-              <a:t>コンフォートホテル博多（7.89点, ¥5,764,630）</a:t>
+              <a:t>コンフォートホテル博多（7.94点, ¥5,764,630）</a:t>
             </a:r>
             <a:endParaRPr lang="en-US" sz="800" dirty="0"/>
           </a:p>
@@ -23510,7 +23510,7 @@
                   <a:srgbClr val="333333"/>
                 </a:solidFill>
               </a:rPr>
-              <a:t>  第一イン池袋（9.5点）
+              <a:t>  第一イン池袋（9.44点）
   京成リッチモンドホテル東京錦糸町（9.32点）
   コンフォートスイーツ東京ベイ（9.07点）
 </a:t>

--- a/納品レポート/PRIMECHANGE戦略レポート/PRIMECHANGE_CS向上戦略提案書.pptx
+++ b/納品レポート/PRIMECHANGE戦略レポート/PRIMECHANGE_CS向上戦略提案書.pptx
@@ -2274,7 +2274,7 @@
                 <a:ea typeface="Arial" pitchFamily="34" charset="-122"/>
                 <a:cs typeface="Arial" pitchFamily="34" charset="-120"/>
               </a:rPr>
-              <a:t>対象：19ホテル | 月間総売上：¥99,847,777 | 口コミ：1787件</a:t>
+              <a:t>対象：19ホテル | 月間総売上：¥99,847,777 | 口コミ：1816件</a:t>
             </a:r>
             <a:endParaRPr lang="en-US" sz="1100" dirty="0"/>
           </a:p>
@@ -15175,7 +15175,7 @@
                 <a:ea typeface="Arial" pitchFamily="34" charset="-122"/>
                 <a:cs typeface="Arial" pitchFamily="34" charset="-120"/>
               </a:rPr>
-              <a:t>4.5%</a:t>
+              <a:t>4.7%</a:t>
             </a:r>
             <a:endParaRPr lang="en-US" sz="2800" dirty="0"/>
           </a:p>
@@ -17496,7 +17496,7 @@
                 <a:ea typeface="Arial" pitchFamily="34" charset="-122"/>
                 <a:cs typeface="Arial" pitchFamily="34" charset="-120"/>
               </a:rPr>
-              <a:t>京成リッチモンドホテル東京錦糸町（9.32点, ¥4,791,800）</a:t>
+              <a:t>京成リッチモンドホテル東京錦糸町（9.31点, ¥4,791,800）</a:t>
             </a:r>
             <a:endParaRPr lang="en-US" sz="800" dirty="0"/>
           </a:p>
@@ -17513,7 +17513,7 @@
                 <a:ea typeface="Arial" pitchFamily="34" charset="-122"/>
                 <a:cs typeface="Arial" pitchFamily="34" charset="-120"/>
               </a:rPr>
-              <a:t>コンフォートスイーツ東京ベイ（9.07点, ¥13,228,360）</a:t>
+              <a:t>コンフォートスイーツ東京ベイ（9.06点, ¥13,228,360）</a:t>
             </a:r>
             <a:endParaRPr lang="en-US" sz="800" dirty="0"/>
           </a:p>
@@ -17547,7 +17547,7 @@
                 <a:ea typeface="Arial" pitchFamily="34" charset="-122"/>
                 <a:cs typeface="Arial" pitchFamily="34" charset="-120"/>
               </a:rPr>
-              <a:t>川崎日航ホテル（8.64点, ¥7,168,120）</a:t>
+              <a:t>ダイワロイネットホテル東京大崎（8.63点, ¥5,203,037）</a:t>
             </a:r>
             <a:endParaRPr lang="en-US" sz="800" dirty="0"/>
           </a:p>
@@ -17564,7 +17564,7 @@
                 <a:ea typeface="Arial" pitchFamily="34" charset="-122"/>
                 <a:cs typeface="Arial" pitchFamily="34" charset="-120"/>
               </a:rPr>
-              <a:t>ダイワロイネットホテル東京大崎（8.63点, ¥5,203,037）</a:t>
+              <a:t>川崎日航ホテル（8.56点, ¥7,168,120）</a:t>
             </a:r>
             <a:endParaRPr lang="en-US" sz="800" dirty="0"/>
           </a:p>
@@ -17581,7 +17581,7 @@
                 <a:ea typeface="Arial" pitchFamily="34" charset="-122"/>
                 <a:cs typeface="Arial" pitchFamily="34" charset="-120"/>
               </a:rPr>
-              <a:t>ハートンホテル東品川（8.41点, ¥11,211,550）</a:t>
+              <a:t>ハートンホテル東品川（8.4点, ¥11,211,550）</a:t>
             </a:r>
             <a:endParaRPr lang="en-US" sz="800" dirty="0"/>
           </a:p>
@@ -17598,7 +17598,7 @@
                 <a:ea typeface="Arial" pitchFamily="34" charset="-122"/>
                 <a:cs typeface="Arial" pitchFamily="34" charset="-120"/>
               </a:rPr>
-              <a:t>変なホテル東京羽田（8.31点, ¥5,358,150）</a:t>
+              <a:t>変なホテル東京羽田（8.25点, ¥5,358,150）</a:t>
             </a:r>
             <a:endParaRPr lang="en-US" sz="800" dirty="0"/>
           </a:p>
@@ -17762,7 +17762,7 @@
                 <a:ea typeface="Arial" pitchFamily="34" charset="-122"/>
                 <a:cs typeface="Arial" pitchFamily="34" charset="-120"/>
               </a:rPr>
-              <a:t>第一イン池袋（9.44点, ¥4,310,610）</a:t>
+              <a:t>第一イン池袋（9.4点, ¥4,310,610）</a:t>
             </a:r>
             <a:endParaRPr lang="en-US" sz="800" dirty="0"/>
           </a:p>
@@ -17779,7 +17779,7 @@
                 <a:ea typeface="Arial" pitchFamily="34" charset="-122"/>
                 <a:cs typeface="Arial" pitchFamily="34" charset="-120"/>
               </a:rPr>
-              <a:t>ホテルケヤキゲート東京府中（8.98点, ¥4,425,395）</a:t>
+              <a:t>ホテルケヤキゲート東京府中（8.97点, ¥4,425,395）</a:t>
             </a:r>
             <a:endParaRPr lang="en-US" sz="800" dirty="0"/>
           </a:p>
@@ -17847,7 +17847,7 @@
                 <a:ea typeface="Arial" pitchFamily="34" charset="-122"/>
                 <a:cs typeface="Arial" pitchFamily="34" charset="-120"/>
               </a:rPr>
-              <a:t>コンフォートイン六本木（8.25点, ¥2,842,630）</a:t>
+              <a:t>コンフォートイン六本木（8.26点, ¥2,842,630）</a:t>
             </a:r>
             <a:endParaRPr lang="en-US" sz="800" dirty="0"/>
           </a:p>
@@ -18028,7 +18028,7 @@
                 <a:ea typeface="Arial" pitchFamily="34" charset="-122"/>
                 <a:cs typeface="Arial" pitchFamily="34" charset="-120"/>
               </a:rPr>
-              <a:t>コンフォートホテル博多（7.94点, ¥5,764,630）</a:t>
+              <a:t>コンフォートホテル博多（7.95点, ¥5,764,630）</a:t>
             </a:r>
             <a:endParaRPr lang="en-US" sz="800" dirty="0"/>
           </a:p>
@@ -23510,9 +23510,9 @@
                   <a:srgbClr val="333333"/>
                 </a:solidFill>
               </a:rPr>
-              <a:t>  第一イン池袋（9.44点）
-  京成リッチモンドホテル東京錦糸町（9.32点）
-  コンフォートスイーツ東京ベイ（9.07点）
+              <a:t>  第一イン池袋（9.4点）
+  京成リッチモンドホテル東京錦糸町（9.31点）
+  コンフォートスイーツ東京ベイ（9.06点）
 </a:t>
             </a:r>
             <a:pPr indent="0" marL="0">

--- a/納品レポート/PRIMECHANGE戦略レポート/PRIMECHANGE_CS向上戦略提案書.pptx
+++ b/納品レポート/PRIMECHANGE戦略レポート/PRIMECHANGE_CS向上戦略提案書.pptx
@@ -2274,7 +2274,7 @@
                 <a:ea typeface="Arial" pitchFamily="34" charset="-122"/>
                 <a:cs typeface="Arial" pitchFamily="34" charset="-120"/>
               </a:rPr>
-              <a:t>対象：19ホテル | 月間総売上：¥99,847,777 | 口コミ：1816件</a:t>
+              <a:t>対象：19ホテル | 月間総売上：¥99,847,777 | 口コミ：1835件</a:t>
             </a:r>
             <a:endParaRPr lang="en-US" sz="1100" dirty="0"/>
           </a:p>
@@ -14925,7 +14925,7 @@
                 <a:ea typeface="Arial" pitchFamily="34" charset="-122"/>
                 <a:cs typeface="Arial" pitchFamily="34" charset="-120"/>
               </a:rPr>
-              <a:t>8.36</a:t>
+              <a:t>8.33</a:t>
             </a:r>
             <a:endParaRPr lang="en-US" sz="2800" dirty="0"/>
           </a:p>
@@ -15175,7 +15175,7 @@
                 <a:ea typeface="Arial" pitchFamily="34" charset="-122"/>
                 <a:cs typeface="Arial" pitchFamily="34" charset="-120"/>
               </a:rPr>
-              <a:t>4.7%</a:t>
+              <a:t>4.9%</a:t>
             </a:r>
             <a:endParaRPr lang="en-US" sz="2800" dirty="0"/>
           </a:p>
@@ -16916,7 +16916,7 @@
                   <a:srgbClr val="333333"/>
                 </a:solidFill>
               </a:rPr>
-              <a:t>8.36点</a:t>
+              <a:t>8.33点</a:t>
             </a:r>
             <a:pPr indent="0" marL="0">
               <a:buNone/>
@@ -17796,7 +17796,7 @@
                 <a:ea typeface="Arial" pitchFamily="34" charset="-122"/>
                 <a:cs typeface="Arial" pitchFamily="34" charset="-120"/>
               </a:rPr>
-              <a:t>コンフォートホテルERA東京東神田（8.93点, ¥4,047,280）</a:t>
+              <a:t>コンフォートホテルERA東京東神田（8.85点, ¥4,047,280）</a:t>
             </a:r>
             <a:endParaRPr lang="en-US" sz="800" dirty="0"/>
           </a:p>
@@ -17813,7 +17813,7 @@
                 <a:ea typeface="Arial" pitchFamily="34" charset="-122"/>
                 <a:cs typeface="Arial" pitchFamily="34" charset="-120"/>
               </a:rPr>
-              <a:t>コンフォートホテル成田（8.66点, ¥2,655,760）</a:t>
+              <a:t>リッチモンドホテル東京目白（8.6点, ¥3,663,440）</a:t>
             </a:r>
             <a:endParaRPr lang="en-US" sz="800" dirty="0"/>
           </a:p>
@@ -17830,7 +17830,7 @@
                 <a:ea typeface="Arial" pitchFamily="34" charset="-122"/>
                 <a:cs typeface="Arial" pitchFamily="34" charset="-120"/>
               </a:rPr>
-              <a:t>リッチモンドホテル東京目白（8.6点, ¥3,663,440）</a:t>
+              <a:t>コンフォートホテル成田（8.46点, ¥2,655,760）</a:t>
             </a:r>
             <a:endParaRPr lang="en-US" sz="800" dirty="0"/>
           </a:p>
